--- a/public/fun/cards/finance/finance-24.pptx
+++ b/public/fun/cards/finance/finance-24.pptx
@@ -3085,7 +3085,7 @@
     <p:bg>
       <p:bgPr>
         <a:solidFill>
-          <a:srgbClr val="F0FAF6"/>
+          <a:srgbClr val="FFFFFF"/>
         </a:solidFill>
         <a:effectLst/>
       </p:bgPr>
@@ -3099,38 +3099,20 @@
       <p:grpSpPr/>
       <p:sp>
         <p:nvSpPr>
-          <p:cNvPr id="2" name="Freeform 1"/>
+          <p:cNvPr id="2" name="Oval 1"/>
           <p:cNvSpPr/>
           <p:nvPr/>
         </p:nvSpPr>
         <p:spPr>
           <a:xfrm>
-            <a:off x="1944000" y="540000"/>
-            <a:ext cx="1296000" cy="1260000"/>
-          </a:xfrm>
-          <a:custGeom>
+            <a:off x="2646000" y="234000"/>
+            <a:ext cx="36000" cy="36000"/>
+          </a:xfrm>
+          <a:prstGeom prst="ellipse">
             <a:avLst/>
-            <a:gdLst/>
-            <a:ahLst/>
-            <a:cxnLst/>
-            <a:rect l="l" t="t" r="r" b="b"/>
-            <a:pathLst>
-              <a:path w="1296000" h="1260000">
-                <a:moveTo>
-                  <a:pt x="1296000" y="1260000"/>
-                </a:moveTo>
-                <a:lnTo>
-                  <a:pt x="1296000" y="0"/>
-                </a:lnTo>
-                <a:lnTo>
-                  <a:pt x="0" y="1260000"/>
-                </a:lnTo>
-                <a:close/>
-              </a:path>
-            </a:pathLst>
-          </a:custGeom>
+          </a:prstGeom>
           <a:solidFill>
-            <a:srgbClr val="246B53"/>
+            <a:srgbClr val="F0262F"/>
           </a:solidFill>
           <a:ln>
             <a:noFill/>
@@ -3146,40 +3128,20 @@
       </p:sp>
       <p:sp>
         <p:nvSpPr>
-          <p:cNvPr id="3" name="Freeform 2"/>
+          <p:cNvPr id="3" name="Oval 2"/>
           <p:cNvSpPr/>
           <p:nvPr/>
         </p:nvSpPr>
         <p:spPr>
           <a:xfrm>
-            <a:off x="2520000" y="1080000"/>
-            <a:ext cx="720000" cy="720000"/>
-          </a:xfrm>
-          <a:custGeom>
+            <a:off x="2646000" y="334800"/>
+            <a:ext cx="36000" cy="36000"/>
+          </a:xfrm>
+          <a:prstGeom prst="ellipse">
             <a:avLst/>
-            <a:gdLst/>
-            <a:ahLst/>
-            <a:cxnLst/>
-            <a:rect l="l" t="t" r="r" b="b"/>
-            <a:pathLst>
-              <a:path w="720000" h="720000">
-                <a:moveTo>
-                  <a:pt x="720000" y="720000"/>
-                </a:moveTo>
-                <a:lnTo>
-                  <a:pt x="720000" y="0"/>
-                </a:lnTo>
-                <a:lnTo>
-                  <a:pt x="0" y="720000"/>
-                </a:lnTo>
-                <a:close/>
-              </a:path>
-            </a:pathLst>
-          </a:custGeom>
+          </a:prstGeom>
           <a:solidFill>
-            <a:srgbClr val="DEF5EE">
-              <a:alpha val="90000"/>
-            </a:srgbClr>
+            <a:srgbClr val="FDE1E2"/>
           </a:solidFill>
           <a:ln>
             <a:noFill/>
@@ -3195,38 +3157,20 @@
       </p:sp>
       <p:sp>
         <p:nvSpPr>
-          <p:cNvPr id="4" name="Freeform 3"/>
+          <p:cNvPr id="4" name="Oval 3"/>
           <p:cNvSpPr/>
           <p:nvPr/>
         </p:nvSpPr>
         <p:spPr>
           <a:xfrm>
-            <a:off x="2829456" y="1364112"/>
-            <a:ext cx="245088" cy="111888"/>
-          </a:xfrm>
-          <a:custGeom>
+            <a:off x="2646000" y="435600"/>
+            <a:ext cx="36000" cy="36000"/>
+          </a:xfrm>
+          <a:prstGeom prst="ellipse">
             <a:avLst/>
-            <a:gdLst/>
-            <a:ahLst/>
-            <a:cxnLst/>
-            <a:rect l="l" t="t" r="r" b="b"/>
-            <a:pathLst>
-              <a:path w="245088" h="111888">
-                <a:moveTo>
-                  <a:pt x="0" y="111888"/>
-                </a:moveTo>
-                <a:lnTo>
-                  <a:pt x="122544" y="0"/>
-                </a:lnTo>
-                <a:lnTo>
-                  <a:pt x="245088" y="111888"/>
-                </a:lnTo>
-                <a:close/>
-              </a:path>
-            </a:pathLst>
-          </a:custGeom>
+          </a:prstGeom>
           <a:solidFill>
-            <a:srgbClr val="FFFFFF"/>
+            <a:srgbClr val="FDE1E2"/>
           </a:solidFill>
           <a:ln>
             <a:noFill/>
@@ -3242,20 +3186,20 @@
       </p:sp>
       <p:sp>
         <p:nvSpPr>
-          <p:cNvPr id="5" name="Rectangle 4"/>
+          <p:cNvPr id="5" name="Oval 4"/>
           <p:cNvSpPr/>
           <p:nvPr/>
         </p:nvSpPr>
         <p:spPr>
           <a:xfrm>
-            <a:off x="2866752" y="1476000"/>
-            <a:ext cx="170496" cy="111888"/>
-          </a:xfrm>
-          <a:prstGeom prst="rect">
+            <a:off x="2646000" y="536400"/>
+            <a:ext cx="36000" cy="36000"/>
+          </a:xfrm>
+          <a:prstGeom prst="ellipse">
             <a:avLst/>
           </a:prstGeom>
           <a:solidFill>
-            <a:srgbClr val="808080"/>
+            <a:srgbClr val="F0262F"/>
           </a:solidFill>
           <a:ln>
             <a:noFill/>
@@ -3271,20 +3215,20 @@
       </p:sp>
       <p:sp>
         <p:nvSpPr>
-          <p:cNvPr id="6" name="Rectangle 5"/>
+          <p:cNvPr id="6" name="Oval 5"/>
           <p:cNvSpPr/>
           <p:nvPr/>
         </p:nvSpPr>
         <p:spPr>
           <a:xfrm>
-            <a:off x="2930688" y="1513296"/>
-            <a:ext cx="42624" cy="74592"/>
-          </a:xfrm>
-          <a:prstGeom prst="rect">
+            <a:off x="2746800" y="234000"/>
+            <a:ext cx="36000" cy="36000"/>
+          </a:xfrm>
+          <a:prstGeom prst="ellipse">
             <a:avLst/>
           </a:prstGeom>
           <a:solidFill>
-            <a:srgbClr val="FFFFFF"/>
+            <a:srgbClr val="FDE1E2"/>
           </a:solidFill>
           <a:ln>
             <a:noFill/>
@@ -3300,14 +3244,449 @@
       </p:sp>
       <p:sp>
         <p:nvSpPr>
-          <p:cNvPr id="7" name="텍스트"/>
+          <p:cNvPr id="7" name="Oval 6"/>
+          <p:cNvSpPr/>
+          <p:nvPr/>
+        </p:nvSpPr>
+        <p:spPr>
+          <a:xfrm>
+            <a:off x="2746800" y="334800"/>
+            <a:ext cx="36000" cy="36000"/>
+          </a:xfrm>
+          <a:prstGeom prst="ellipse">
+            <a:avLst/>
+          </a:prstGeom>
+          <a:solidFill>
+            <a:srgbClr val="FDE1E2"/>
+          </a:solidFill>
+          <a:ln>
+            <a:noFill/>
+          </a:ln>
+        </p:spPr>
+        <p:txBody>
+          <a:bodyPr rtlCol="0" anchor="ctr"/>
+          <a:lstStyle/>
+          <a:p>
+            <a:pPr algn="ctr"/>
+          </a:p>
+        </p:txBody>
+      </p:sp>
+      <p:sp>
+        <p:nvSpPr>
+          <p:cNvPr id="8" name="Oval 7"/>
+          <p:cNvSpPr/>
+          <p:nvPr/>
+        </p:nvSpPr>
+        <p:spPr>
+          <a:xfrm>
+            <a:off x="2746800" y="435600"/>
+            <a:ext cx="36000" cy="36000"/>
+          </a:xfrm>
+          <a:prstGeom prst="ellipse">
+            <a:avLst/>
+          </a:prstGeom>
+          <a:solidFill>
+            <a:srgbClr val="F0262F"/>
+          </a:solidFill>
+          <a:ln>
+            <a:noFill/>
+          </a:ln>
+        </p:spPr>
+        <p:txBody>
+          <a:bodyPr rtlCol="0" anchor="ctr"/>
+          <a:lstStyle/>
+          <a:p>
+            <a:pPr algn="ctr"/>
+          </a:p>
+        </p:txBody>
+      </p:sp>
+      <p:sp>
+        <p:nvSpPr>
+          <p:cNvPr id="9" name="Oval 8"/>
+          <p:cNvSpPr/>
+          <p:nvPr/>
+        </p:nvSpPr>
+        <p:spPr>
+          <a:xfrm>
+            <a:off x="2746800" y="536400"/>
+            <a:ext cx="36000" cy="36000"/>
+          </a:xfrm>
+          <a:prstGeom prst="ellipse">
+            <a:avLst/>
+          </a:prstGeom>
+          <a:solidFill>
+            <a:srgbClr val="FDE1E2"/>
+          </a:solidFill>
+          <a:ln>
+            <a:noFill/>
+          </a:ln>
+        </p:spPr>
+        <p:txBody>
+          <a:bodyPr rtlCol="0" anchor="ctr"/>
+          <a:lstStyle/>
+          <a:p>
+            <a:pPr algn="ctr"/>
+          </a:p>
+        </p:txBody>
+      </p:sp>
+      <p:sp>
+        <p:nvSpPr>
+          <p:cNvPr id="10" name="Oval 9"/>
+          <p:cNvSpPr/>
+          <p:nvPr/>
+        </p:nvSpPr>
+        <p:spPr>
+          <a:xfrm>
+            <a:off x="2847600" y="234000"/>
+            <a:ext cx="36000" cy="36000"/>
+          </a:xfrm>
+          <a:prstGeom prst="ellipse">
+            <a:avLst/>
+          </a:prstGeom>
+          <a:solidFill>
+            <a:srgbClr val="FDE1E2"/>
+          </a:solidFill>
+          <a:ln>
+            <a:noFill/>
+          </a:ln>
+        </p:spPr>
+        <p:txBody>
+          <a:bodyPr rtlCol="0" anchor="ctr"/>
+          <a:lstStyle/>
+          <a:p>
+            <a:pPr algn="ctr"/>
+          </a:p>
+        </p:txBody>
+      </p:sp>
+      <p:sp>
+        <p:nvSpPr>
+          <p:cNvPr id="11" name="Oval 10"/>
+          <p:cNvSpPr/>
+          <p:nvPr/>
+        </p:nvSpPr>
+        <p:spPr>
+          <a:xfrm>
+            <a:off x="2847600" y="334800"/>
+            <a:ext cx="36000" cy="36000"/>
+          </a:xfrm>
+          <a:prstGeom prst="ellipse">
+            <a:avLst/>
+          </a:prstGeom>
+          <a:solidFill>
+            <a:srgbClr val="F0262F"/>
+          </a:solidFill>
+          <a:ln>
+            <a:noFill/>
+          </a:ln>
+        </p:spPr>
+        <p:txBody>
+          <a:bodyPr rtlCol="0" anchor="ctr"/>
+          <a:lstStyle/>
+          <a:p>
+            <a:pPr algn="ctr"/>
+          </a:p>
+        </p:txBody>
+      </p:sp>
+      <p:sp>
+        <p:nvSpPr>
+          <p:cNvPr id="12" name="Oval 11"/>
+          <p:cNvSpPr/>
+          <p:nvPr/>
+        </p:nvSpPr>
+        <p:spPr>
+          <a:xfrm>
+            <a:off x="2847600" y="435600"/>
+            <a:ext cx="36000" cy="36000"/>
+          </a:xfrm>
+          <a:prstGeom prst="ellipse">
+            <a:avLst/>
+          </a:prstGeom>
+          <a:solidFill>
+            <a:srgbClr val="FDE1E2"/>
+          </a:solidFill>
+          <a:ln>
+            <a:noFill/>
+          </a:ln>
+        </p:spPr>
+        <p:txBody>
+          <a:bodyPr rtlCol="0" anchor="ctr"/>
+          <a:lstStyle/>
+          <a:p>
+            <a:pPr algn="ctr"/>
+          </a:p>
+        </p:txBody>
+      </p:sp>
+      <p:sp>
+        <p:nvSpPr>
+          <p:cNvPr id="13" name="Oval 12"/>
+          <p:cNvSpPr/>
+          <p:nvPr/>
+        </p:nvSpPr>
+        <p:spPr>
+          <a:xfrm>
+            <a:off x="2847600" y="536400"/>
+            <a:ext cx="36000" cy="36000"/>
+          </a:xfrm>
+          <a:prstGeom prst="ellipse">
+            <a:avLst/>
+          </a:prstGeom>
+          <a:solidFill>
+            <a:srgbClr val="FDE1E2"/>
+          </a:solidFill>
+          <a:ln>
+            <a:noFill/>
+          </a:ln>
+        </p:spPr>
+        <p:txBody>
+          <a:bodyPr rtlCol="0" anchor="ctr"/>
+          <a:lstStyle/>
+          <a:p>
+            <a:pPr algn="ctr"/>
+          </a:p>
+        </p:txBody>
+      </p:sp>
+      <p:sp>
+        <p:nvSpPr>
+          <p:cNvPr id="14" name="Oval 13"/>
+          <p:cNvSpPr/>
+          <p:nvPr/>
+        </p:nvSpPr>
+        <p:spPr>
+          <a:xfrm>
+            <a:off x="2948400" y="234000"/>
+            <a:ext cx="36000" cy="36000"/>
+          </a:xfrm>
+          <a:prstGeom prst="ellipse">
+            <a:avLst/>
+          </a:prstGeom>
+          <a:solidFill>
+            <a:srgbClr val="F0262F"/>
+          </a:solidFill>
+          <a:ln>
+            <a:noFill/>
+          </a:ln>
+        </p:spPr>
+        <p:txBody>
+          <a:bodyPr rtlCol="0" anchor="ctr"/>
+          <a:lstStyle/>
+          <a:p>
+            <a:pPr algn="ctr"/>
+          </a:p>
+        </p:txBody>
+      </p:sp>
+      <p:sp>
+        <p:nvSpPr>
+          <p:cNvPr id="15" name="Oval 14"/>
+          <p:cNvSpPr/>
+          <p:nvPr/>
+        </p:nvSpPr>
+        <p:spPr>
+          <a:xfrm>
+            <a:off x="2948400" y="334800"/>
+            <a:ext cx="36000" cy="36000"/>
+          </a:xfrm>
+          <a:prstGeom prst="ellipse">
+            <a:avLst/>
+          </a:prstGeom>
+          <a:solidFill>
+            <a:srgbClr val="FDE1E2"/>
+          </a:solidFill>
+          <a:ln>
+            <a:noFill/>
+          </a:ln>
+        </p:spPr>
+        <p:txBody>
+          <a:bodyPr rtlCol="0" anchor="ctr"/>
+          <a:lstStyle/>
+          <a:p>
+            <a:pPr algn="ctr"/>
+          </a:p>
+        </p:txBody>
+      </p:sp>
+      <p:sp>
+        <p:nvSpPr>
+          <p:cNvPr id="16" name="Oval 15"/>
+          <p:cNvSpPr/>
+          <p:nvPr/>
+        </p:nvSpPr>
+        <p:spPr>
+          <a:xfrm>
+            <a:off x="2948400" y="435600"/>
+            <a:ext cx="36000" cy="36000"/>
+          </a:xfrm>
+          <a:prstGeom prst="ellipse">
+            <a:avLst/>
+          </a:prstGeom>
+          <a:solidFill>
+            <a:srgbClr val="FDE1E2"/>
+          </a:solidFill>
+          <a:ln>
+            <a:noFill/>
+          </a:ln>
+        </p:spPr>
+        <p:txBody>
+          <a:bodyPr rtlCol="0" anchor="ctr"/>
+          <a:lstStyle/>
+          <a:p>
+            <a:pPr algn="ctr"/>
+          </a:p>
+        </p:txBody>
+      </p:sp>
+      <p:sp>
+        <p:nvSpPr>
+          <p:cNvPr id="17" name="Oval 16"/>
+          <p:cNvSpPr/>
+          <p:nvPr/>
+        </p:nvSpPr>
+        <p:spPr>
+          <a:xfrm>
+            <a:off x="2948400" y="536400"/>
+            <a:ext cx="36000" cy="36000"/>
+          </a:xfrm>
+          <a:prstGeom prst="ellipse">
+            <a:avLst/>
+          </a:prstGeom>
+          <a:solidFill>
+            <a:srgbClr val="F0262F"/>
+          </a:solidFill>
+          <a:ln>
+            <a:noFill/>
+          </a:ln>
+        </p:spPr>
+        <p:txBody>
+          <a:bodyPr rtlCol="0" anchor="ctr"/>
+          <a:lstStyle/>
+          <a:p>
+            <a:pPr algn="ctr"/>
+          </a:p>
+        </p:txBody>
+      </p:sp>
+      <p:sp>
+        <p:nvSpPr>
+          <p:cNvPr id="18" name="Oval 17"/>
+          <p:cNvSpPr/>
+          <p:nvPr/>
+        </p:nvSpPr>
+        <p:spPr>
+          <a:xfrm>
+            <a:off x="3049200" y="234000"/>
+            <a:ext cx="36000" cy="36000"/>
+          </a:xfrm>
+          <a:prstGeom prst="ellipse">
+            <a:avLst/>
+          </a:prstGeom>
+          <a:solidFill>
+            <a:srgbClr val="FDE1E2"/>
+          </a:solidFill>
+          <a:ln>
+            <a:noFill/>
+          </a:ln>
+        </p:spPr>
+        <p:txBody>
+          <a:bodyPr rtlCol="0" anchor="ctr"/>
+          <a:lstStyle/>
+          <a:p>
+            <a:pPr algn="ctr"/>
+          </a:p>
+        </p:txBody>
+      </p:sp>
+      <p:sp>
+        <p:nvSpPr>
+          <p:cNvPr id="19" name="Oval 18"/>
+          <p:cNvSpPr/>
+          <p:nvPr/>
+        </p:nvSpPr>
+        <p:spPr>
+          <a:xfrm>
+            <a:off x="3049200" y="334800"/>
+            <a:ext cx="36000" cy="36000"/>
+          </a:xfrm>
+          <a:prstGeom prst="ellipse">
+            <a:avLst/>
+          </a:prstGeom>
+          <a:solidFill>
+            <a:srgbClr val="FDE1E2"/>
+          </a:solidFill>
+          <a:ln>
+            <a:noFill/>
+          </a:ln>
+        </p:spPr>
+        <p:txBody>
+          <a:bodyPr rtlCol="0" anchor="ctr"/>
+          <a:lstStyle/>
+          <a:p>
+            <a:pPr algn="ctr"/>
+          </a:p>
+        </p:txBody>
+      </p:sp>
+      <p:sp>
+        <p:nvSpPr>
+          <p:cNvPr id="20" name="Oval 19"/>
+          <p:cNvSpPr/>
+          <p:nvPr/>
+        </p:nvSpPr>
+        <p:spPr>
+          <a:xfrm>
+            <a:off x="3049200" y="435600"/>
+            <a:ext cx="36000" cy="36000"/>
+          </a:xfrm>
+          <a:prstGeom prst="ellipse">
+            <a:avLst/>
+          </a:prstGeom>
+          <a:solidFill>
+            <a:srgbClr val="F0262F"/>
+          </a:solidFill>
+          <a:ln>
+            <a:noFill/>
+          </a:ln>
+        </p:spPr>
+        <p:txBody>
+          <a:bodyPr rtlCol="0" anchor="ctr"/>
+          <a:lstStyle/>
+          <a:p>
+            <a:pPr algn="ctr"/>
+          </a:p>
+        </p:txBody>
+      </p:sp>
+      <p:sp>
+        <p:nvSpPr>
+          <p:cNvPr id="21" name="Oval 20"/>
+          <p:cNvSpPr/>
+          <p:nvPr/>
+        </p:nvSpPr>
+        <p:spPr>
+          <a:xfrm>
+            <a:off x="3049200" y="536400"/>
+            <a:ext cx="36000" cy="36000"/>
+          </a:xfrm>
+          <a:prstGeom prst="ellipse">
+            <a:avLst/>
+          </a:prstGeom>
+          <a:solidFill>
+            <a:srgbClr val="FDE1E2"/>
+          </a:solidFill>
+          <a:ln>
+            <a:noFill/>
+          </a:ln>
+        </p:spPr>
+        <p:txBody>
+          <a:bodyPr rtlCol="0" anchor="ctr"/>
+          <a:lstStyle/>
+          <a:p>
+            <a:pPr algn="ctr"/>
+          </a:p>
+        </p:txBody>
+      </p:sp>
+      <p:sp>
+        <p:nvSpPr>
+          <p:cNvPr id="22" name="텍스트"/>
           <p:cNvSpPr txBox="1"/>
           <p:nvPr/>
         </p:nvSpPr>
         <p:spPr>
           <a:xfrm>
-            <a:off x="252000" y="201600"/>
-            <a:ext cx="1800000" cy="100800"/>
+            <a:off x="252000" y="223200"/>
+            <a:ext cx="1440000" cy="133351"/>
           </a:xfrm>
           <a:prstGeom prst="rect">
             <a:avLst/>
@@ -3322,13 +3701,13 @@
           <a:p>
             <a:pPr algn="l">
               <a:lnSpc>
-                <a:spcPts val="1087"/>
+                <a:spcPts val="1015"/>
               </a:lnSpc>
             </a:pPr>
             <a:r>
-              <a:rPr sz="750" b="1" spc="150">
+              <a:rPr sz="700" b="1" spc="200">
                 <a:solidFill>
-                  <a:srgbClr val="577269"/>
+                  <a:srgbClr val="6B7280"/>
                 </a:solidFill>
                 <a:latin typeface="맑은 고딕"/>
                 <a:ea typeface="맑은 고딕"/>
@@ -3340,14 +3719,14 @@
       </p:sp>
       <p:sp>
         <p:nvSpPr>
-          <p:cNvPr id="8" name="텍스트"/>
+          <p:cNvPr id="23" name="텍스트"/>
           <p:cNvSpPr txBox="1"/>
           <p:nvPr/>
         </p:nvSpPr>
         <p:spPr>
           <a:xfrm>
-            <a:off x="252000" y="360000"/>
-            <a:ext cx="2016000" cy="313692"/>
+            <a:off x="252000" y="770400"/>
+            <a:ext cx="2016000" cy="360000"/>
           </a:xfrm>
           <a:prstGeom prst="rect">
             <a:avLst/>
@@ -3362,13 +3741,13 @@
           <a:p>
             <a:pPr algn="l">
               <a:lnSpc>
-                <a:spcPts val="2755"/>
+                <a:spcPts val="3190"/>
               </a:lnSpc>
             </a:pPr>
             <a:r>
-              <a:rPr sz="1900" b="1" spc="50">
+              <a:rPr sz="2200" b="1">
                 <a:solidFill>
-                  <a:srgbClr val="143D30"/>
+                  <a:srgbClr val="12151C"/>
                 </a:solidFill>
                 <a:latin typeface="맑은 고딕"/>
                 <a:ea typeface="맑은 고딕"/>
@@ -3380,14 +3759,14 @@
       </p:sp>
       <p:sp>
         <p:nvSpPr>
-          <p:cNvPr id="9" name="텍스트"/>
+          <p:cNvPr id="24" name="텍스트"/>
           <p:cNvSpPr txBox="1"/>
           <p:nvPr/>
         </p:nvSpPr>
         <p:spPr>
           <a:xfrm>
-            <a:off x="252000" y="655200"/>
-            <a:ext cx="1872000" cy="122400"/>
+            <a:off x="252000" y="1173600"/>
+            <a:ext cx="2016000" cy="171451"/>
           </a:xfrm>
           <a:prstGeom prst="rect">
             <a:avLst/>
@@ -3402,13 +3781,13 @@
           <a:p>
             <a:pPr algn="l">
               <a:lnSpc>
-                <a:spcPts val="1232"/>
+                <a:spcPts val="1305"/>
               </a:lnSpc>
             </a:pPr>
             <a:r>
-              <a:rPr sz="850" b="1">
+              <a:rPr sz="900" b="0">
                 <a:solidFill>
-                  <a:srgbClr val="246B53"/>
+                  <a:srgbClr val="6B7280"/>
                 </a:solidFill>
                 <a:latin typeface="맑은 고딕"/>
                 <a:ea typeface="맑은 고딕"/>
@@ -3420,43 +3799,14 @@
       </p:sp>
       <p:sp>
         <p:nvSpPr>
-          <p:cNvPr id="10" name="Rectangle 9"/>
-          <p:cNvSpPr/>
-          <p:nvPr/>
-        </p:nvSpPr>
-        <p:spPr>
-          <a:xfrm>
-            <a:off x="252000" y="864000"/>
-            <a:ext cx="230400" cy="14400"/>
-          </a:xfrm>
-          <a:prstGeom prst="rect">
-            <a:avLst/>
-          </a:prstGeom>
-          <a:solidFill>
-            <a:srgbClr val="246B53"/>
-          </a:solidFill>
-          <a:ln>
-            <a:noFill/>
-          </a:ln>
-        </p:spPr>
-        <p:txBody>
-          <a:bodyPr rtlCol="0" anchor="ctr"/>
-          <a:lstStyle/>
-          <a:p>
-            <a:pPr algn="ctr"/>
-          </a:p>
-        </p:txBody>
-      </p:sp>
-      <p:sp>
-        <p:nvSpPr>
-          <p:cNvPr id="11" name="텍스트"/>
+          <p:cNvPr id="25" name="텍스트"/>
           <p:cNvSpPr txBox="1"/>
           <p:nvPr/>
         </p:nvSpPr>
         <p:spPr>
           <a:xfrm>
-            <a:off x="252000" y="1044000"/>
-            <a:ext cx="122400" cy="168911"/>
+            <a:off x="1620000" y="1339200"/>
+            <a:ext cx="1368000" cy="133351"/>
           </a:xfrm>
           <a:prstGeom prst="rect">
             <a:avLst/>
@@ -3469,55 +3819,15 @@
           </a:bodyPr>
           <a:lstStyle/>
           <a:p>
-            <a:pPr algn="l">
+            <a:pPr algn="r">
               <a:lnSpc>
                 <a:spcPts val="1015"/>
               </a:lnSpc>
             </a:pPr>
             <a:r>
-              <a:rPr sz="700" b="1">
-                <a:solidFill>
-                  <a:srgbClr val="246B53"/>
-                </a:solidFill>
-                <a:latin typeface="맑은 고딕"/>
-                <a:ea typeface="맑은 고딕"/>
-              </a:rPr>
-              <a:t>T</a:t>
-            </a:r>
-          </a:p>
-        </p:txBody>
-      </p:sp>
-      <p:sp>
-        <p:nvSpPr>
-          <p:cNvPr id="12" name="텍스트"/>
-          <p:cNvSpPr txBox="1"/>
-          <p:nvPr/>
-        </p:nvSpPr>
-        <p:spPr>
-          <a:xfrm>
-            <a:off x="396000" y="1044000"/>
-            <a:ext cx="1584000" cy="168911"/>
-          </a:xfrm>
-          <a:prstGeom prst="rect">
-            <a:avLst/>
-          </a:prstGeom>
-          <a:noFill/>
-        </p:spPr>
-        <p:txBody>
-          <a:bodyPr wrap="square" lIns="0" rIns="0" tIns="0" bIns="0" anchor="t">
-            <a:spAutoFit/>
-          </a:bodyPr>
-          <a:lstStyle/>
-          <a:p>
-            <a:pPr algn="l">
-              <a:lnSpc>
-                <a:spcPts val="1015"/>
-              </a:lnSpc>
-            </a:pPr>
-            <a:r>
               <a:rPr sz="700" b="0">
                 <a:solidFill>
-                  <a:srgbClr val="143D30"/>
+                  <a:srgbClr val="12151C"/>
                 </a:solidFill>
                 <a:latin typeface="맑은 고딕"/>
                 <a:ea typeface="맑은 고딕"/>
@@ -3529,14 +3839,14 @@
       </p:sp>
       <p:sp>
         <p:nvSpPr>
-          <p:cNvPr id="13" name="텍스트"/>
+          <p:cNvPr id="26" name="텍스트"/>
           <p:cNvSpPr txBox="1"/>
           <p:nvPr/>
         </p:nvSpPr>
         <p:spPr>
           <a:xfrm>
-            <a:off x="252000" y="1212911"/>
-            <a:ext cx="122400" cy="168911"/>
+            <a:off x="1620000" y="1476000"/>
+            <a:ext cx="1368000" cy="133351"/>
           </a:xfrm>
           <a:prstGeom prst="rect">
             <a:avLst/>
@@ -3549,55 +3859,15 @@
           </a:bodyPr>
           <a:lstStyle/>
           <a:p>
-            <a:pPr algn="l">
+            <a:pPr algn="r">
               <a:lnSpc>
                 <a:spcPts val="1015"/>
               </a:lnSpc>
             </a:pPr>
             <a:r>
-              <a:rPr sz="700" b="1">
-                <a:solidFill>
-                  <a:srgbClr val="246B53"/>
-                </a:solidFill>
-                <a:latin typeface="맑은 고딕"/>
-                <a:ea typeface="맑은 고딕"/>
-              </a:rPr>
-              <a:t>E</a:t>
-            </a:r>
-          </a:p>
-        </p:txBody>
-      </p:sp>
-      <p:sp>
-        <p:nvSpPr>
-          <p:cNvPr id="14" name="텍스트"/>
-          <p:cNvSpPr txBox="1"/>
-          <p:nvPr/>
-        </p:nvSpPr>
-        <p:spPr>
-          <a:xfrm>
-            <a:off x="396000" y="1212911"/>
-            <a:ext cx="1584000" cy="168911"/>
-          </a:xfrm>
-          <a:prstGeom prst="rect">
-            <a:avLst/>
-          </a:prstGeom>
-          <a:noFill/>
-        </p:spPr>
-        <p:txBody>
-          <a:bodyPr wrap="square" lIns="0" rIns="0" tIns="0" bIns="0" anchor="t">
-            <a:spAutoFit/>
-          </a:bodyPr>
-          <a:lstStyle/>
-          <a:p>
-            <a:pPr algn="l">
-              <a:lnSpc>
-                <a:spcPts val="1015"/>
-              </a:lnSpc>
-            </a:pPr>
-            <a:r>
               <a:rPr sz="700" b="0">
                 <a:solidFill>
-                  <a:srgbClr val="143D30"/>
+                  <a:srgbClr val="12151C"/>
                 </a:solidFill>
                 <a:latin typeface="맑은 고딕"/>
                 <a:ea typeface="맑은 고딕"/>
@@ -3609,14 +3879,14 @@
       </p:sp>
       <p:sp>
         <p:nvSpPr>
-          <p:cNvPr id="15" name="텍스트"/>
+          <p:cNvPr id="27" name="텍스트"/>
           <p:cNvSpPr txBox="1"/>
           <p:nvPr/>
         </p:nvSpPr>
         <p:spPr>
           <a:xfrm>
-            <a:off x="252000" y="1381822"/>
-            <a:ext cx="122400" cy="168911"/>
+            <a:off x="1620000" y="1612800"/>
+            <a:ext cx="1368000" cy="133351"/>
           </a:xfrm>
           <a:prstGeom prst="rect">
             <a:avLst/>
@@ -3629,55 +3899,15 @@
           </a:bodyPr>
           <a:lstStyle/>
           <a:p>
-            <a:pPr algn="l">
+            <a:pPr algn="r">
               <a:lnSpc>
                 <a:spcPts val="1015"/>
               </a:lnSpc>
             </a:pPr>
             <a:r>
-              <a:rPr sz="700" b="1">
-                <a:solidFill>
-                  <a:srgbClr val="246B53"/>
-                </a:solidFill>
-                <a:latin typeface="맑은 고딕"/>
-                <a:ea typeface="맑은 고딕"/>
-              </a:rPr>
-              <a:t>A</a:t>
-            </a:r>
-          </a:p>
-        </p:txBody>
-      </p:sp>
-      <p:sp>
-        <p:nvSpPr>
-          <p:cNvPr id="16" name="텍스트"/>
-          <p:cNvSpPr txBox="1"/>
-          <p:nvPr/>
-        </p:nvSpPr>
-        <p:spPr>
-          <a:xfrm>
-            <a:off x="396000" y="1381822"/>
-            <a:ext cx="1584000" cy="168911"/>
-          </a:xfrm>
-          <a:prstGeom prst="rect">
-            <a:avLst/>
-          </a:prstGeom>
-          <a:noFill/>
-        </p:spPr>
-        <p:txBody>
-          <a:bodyPr wrap="square" lIns="0" rIns="0" tIns="0" bIns="0" anchor="t">
-            <a:spAutoFit/>
-          </a:bodyPr>
-          <a:lstStyle/>
-          <a:p>
-            <a:pPr algn="l">
-              <a:lnSpc>
-                <a:spcPts val="1015"/>
-              </a:lnSpc>
-            </a:pPr>
-            <a:r>
               <a:rPr sz="700" b="0">
                 <a:solidFill>
-                  <a:srgbClr val="143D30"/>
+                  <a:srgbClr val="12151C"/>
                 </a:solidFill>
                 <a:latin typeface="맑은 고딕"/>
                 <a:ea typeface="맑은 고딕"/>
@@ -3701,7 +3931,7 @@
     <p:bg>
       <p:bgPr>
         <a:solidFill>
-          <a:srgbClr val="F0F8F9"/>
+          <a:srgbClr val="FFFFFF"/>
         </a:solidFill>
         <a:effectLst/>
       </p:bgPr>
@@ -3722,13 +3952,13 @@
         <p:spPr>
           <a:xfrm>
             <a:off x="0" y="0"/>
-            <a:ext cx="1224000" cy="1800000"/>
+            <a:ext cx="3240000" cy="1800000"/>
           </a:xfrm>
           <a:prstGeom prst="rect">
             <a:avLst/>
           </a:prstGeom>
           <a:solidFill>
-            <a:srgbClr val="3F95A6"/>
+            <a:srgbClr val="F0262F"/>
           </a:solidFill>
           <a:ln>
             <a:noFill/>
@@ -3750,8 +3980,8 @@
         </p:nvSpPr>
         <p:spPr>
           <a:xfrm>
-            <a:off x="363600" y="673200"/>
-            <a:ext cx="496800" cy="226800"/>
+            <a:off x="2412000" y="972000"/>
+            <a:ext cx="828000" cy="828000"/>
           </a:xfrm>
           <a:custGeom>
             <a:avLst/>
@@ -3760,22 +3990,91 @@
             <a:cxnLst/>
             <a:rect l="l" t="t" r="r" b="b"/>
             <a:pathLst>
-              <a:path w="496800" h="226800">
+              <a:path w="828000" h="828000">
                 <a:moveTo>
-                  <a:pt x="0" y="226800"/>
+                  <a:pt x="828000" y="828000"/>
                 </a:moveTo>
                 <a:lnTo>
-                  <a:pt x="248400" y="0"/>
+                  <a:pt x="0" y="828000"/>
                 </a:lnTo>
                 <a:lnTo>
-                  <a:pt x="496800" y="226800"/>
+                  <a:pt x="1773" y="773846"/>
+                </a:lnTo>
+                <a:lnTo>
+                  <a:pt x="7084" y="719924"/>
+                </a:lnTo>
+                <a:lnTo>
+                  <a:pt x="15910" y="666465"/>
+                </a:lnTo>
+                <a:lnTo>
+                  <a:pt x="28213" y="613698"/>
+                </a:lnTo>
+                <a:lnTo>
+                  <a:pt x="43942" y="561848"/>
+                </a:lnTo>
+                <a:lnTo>
+                  <a:pt x="63028" y="511138"/>
+                </a:lnTo>
+                <a:lnTo>
+                  <a:pt x="85389" y="461785"/>
+                </a:lnTo>
+                <a:lnTo>
+                  <a:pt x="110931" y="414000"/>
+                </a:lnTo>
+                <a:lnTo>
+                  <a:pt x="139543" y="367988"/>
+                </a:lnTo>
+                <a:lnTo>
+                  <a:pt x="171103" y="323946"/>
+                </a:lnTo>
+                <a:lnTo>
+                  <a:pt x="205477" y="282062"/>
+                </a:lnTo>
+                <a:lnTo>
+                  <a:pt x="242516" y="242516"/>
+                </a:lnTo>
+                <a:lnTo>
+                  <a:pt x="282062" y="205477"/>
+                </a:lnTo>
+                <a:lnTo>
+                  <a:pt x="323946" y="171103"/>
+                </a:lnTo>
+                <a:lnTo>
+                  <a:pt x="367988" y="139543"/>
+                </a:lnTo>
+                <a:lnTo>
+                  <a:pt x="414000" y="110931"/>
+                </a:lnTo>
+                <a:lnTo>
+                  <a:pt x="461785" y="85389"/>
+                </a:lnTo>
+                <a:lnTo>
+                  <a:pt x="511138" y="63028"/>
+                </a:lnTo>
+                <a:lnTo>
+                  <a:pt x="561848" y="43942"/>
+                </a:lnTo>
+                <a:lnTo>
+                  <a:pt x="613698" y="28213"/>
+                </a:lnTo>
+                <a:lnTo>
+                  <a:pt x="666465" y="15910"/>
+                </a:lnTo>
+                <a:lnTo>
+                  <a:pt x="719924" y="7084"/>
+                </a:lnTo>
+                <a:lnTo>
+                  <a:pt x="773846" y="1773"/>
+                </a:lnTo>
+                <a:lnTo>
+                  <a:pt x="828000" y="0"/>
                 </a:lnTo>
                 <a:close/>
               </a:path>
             </a:pathLst>
           </a:custGeom>
           <a:solidFill>
-            <a:srgbClr val="FFFFFF"/>
+            <a:srgbClr val="F3565D"/>
           </a:solidFill>
           <a:ln>
             <a:noFill/>
@@ -3791,72 +4090,14 @@
       </p:sp>
       <p:sp>
         <p:nvSpPr>
-          <p:cNvPr id="4" name="Rectangle 3"/>
-          <p:cNvSpPr/>
-          <p:nvPr/>
-        </p:nvSpPr>
-        <p:spPr>
-          <a:xfrm>
-            <a:off x="439200" y="900000"/>
-            <a:ext cx="345600" cy="226800"/>
-          </a:xfrm>
-          <a:prstGeom prst="rect">
-            <a:avLst/>
-          </a:prstGeom>
-          <a:solidFill>
-            <a:srgbClr val="808080"/>
-          </a:solidFill>
-          <a:ln>
-            <a:noFill/>
-          </a:ln>
-        </p:spPr>
-        <p:txBody>
-          <a:bodyPr rtlCol="0" anchor="ctr"/>
-          <a:lstStyle/>
-          <a:p>
-            <a:pPr algn="ctr"/>
-          </a:p>
-        </p:txBody>
-      </p:sp>
-      <p:sp>
-        <p:nvSpPr>
-          <p:cNvPr id="5" name="Rectangle 4"/>
-          <p:cNvSpPr/>
-          <p:nvPr/>
-        </p:nvSpPr>
-        <p:spPr>
-          <a:xfrm>
-            <a:off x="568800" y="975600"/>
-            <a:ext cx="86400" cy="151200"/>
-          </a:xfrm>
-          <a:prstGeom prst="rect">
-            <a:avLst/>
-          </a:prstGeom>
-          <a:solidFill>
-            <a:srgbClr val="FFFFFF"/>
-          </a:solidFill>
-          <a:ln>
-            <a:noFill/>
-          </a:ln>
-        </p:spPr>
-        <p:txBody>
-          <a:bodyPr rtlCol="0" anchor="ctr"/>
-          <a:lstStyle/>
-          <a:p>
-            <a:pPr algn="ctr"/>
-          </a:p>
-        </p:txBody>
-      </p:sp>
-      <p:sp>
-        <p:nvSpPr>
-          <p:cNvPr id="6" name="텍스트"/>
+          <p:cNvPr id="4" name="텍스트"/>
           <p:cNvSpPr txBox="1"/>
           <p:nvPr/>
         </p:nvSpPr>
         <p:spPr>
           <a:xfrm>
-            <a:off x="1440000" y="432000"/>
-            <a:ext cx="1584000" cy="792000"/>
+            <a:off x="252000" y="432000"/>
+            <a:ext cx="2304000" cy="720000"/>
           </a:xfrm>
           <a:prstGeom prst="rect">
             <a:avLst/>
@@ -3864,85 +4105,39 @@
           <a:noFill/>
         </p:spPr>
         <p:txBody>
-          <a:bodyPr wrap="square" lIns="0" rIns="0" tIns="0" bIns="0" anchor="ctr">
+          <a:bodyPr wrap="square" lIns="0" rIns="0" tIns="0" bIns="0" anchor="t">
             <a:spAutoFit/>
           </a:bodyPr>
           <a:lstStyle/>
           <a:p>
             <a:pPr algn="l">
               <a:lnSpc>
-                <a:spcPts val="1667"/>
+                <a:spcPts val="1884"/>
               </a:lnSpc>
             </a:pPr>
             <a:r>
-              <a:rPr sz="1150" b="1">
+              <a:rPr sz="1300" b="1">
                 <a:solidFill>
-                  <a:srgbClr val="23535C"/>
+                  <a:srgbClr val="FFFFFF"/>
                 </a:solidFill>
-                <a:latin typeface="바탕"/>
-                <a:ea typeface="바탕"/>
+                <a:latin typeface="맑은 고딕"/>
+                <a:ea typeface="맑은 고딕"/>
               </a:rPr>
-              <a:t>오래 보아도</a:t>
-            </a:r>
-          </a:p>
-          <a:p>
-            <a:pPr algn="l">
-              <a:lnSpc>
-                <a:spcPts val="1667"/>
-              </a:lnSpc>
-            </a:pPr>
-            <a:r>
-              <a:rPr sz="1150" b="1">
-                <a:solidFill>
-                  <a:srgbClr val="23535C"/>
-                </a:solidFill>
-                <a:latin typeface="바탕"/>
-                <a:ea typeface="바탕"/>
-              </a:rPr>
-              <a:t>편안한 사이</a:t>
-            </a:r>
-          </a:p>
-        </p:txBody>
-      </p:sp>
-      <p:sp>
-        <p:nvSpPr>
-          <p:cNvPr id="7" name="Rectangle 6"/>
-          <p:cNvSpPr/>
-          <p:nvPr/>
-        </p:nvSpPr>
-        <p:spPr>
-          <a:xfrm>
-            <a:off x="1440000" y="1317600"/>
-            <a:ext cx="180000" cy="10800"/>
-          </a:xfrm>
-          <a:prstGeom prst="rect">
-            <a:avLst/>
-          </a:prstGeom>
-          <a:solidFill>
-            <a:srgbClr val="3F95A6"/>
-          </a:solidFill>
-          <a:ln>
-            <a:noFill/>
-          </a:ln>
-        </p:spPr>
-        <p:txBody>
-          <a:bodyPr rtlCol="0" anchor="ctr"/>
-          <a:lstStyle/>
-          <a:p>
-            <a:pPr algn="ctr"/>
-          </a:p>
-        </p:txBody>
-      </p:sp>
-      <p:sp>
-        <p:nvSpPr>
-          <p:cNvPr id="8" name="텍스트"/>
+              <a:t>오래 보아도 편안한 사이</a:t>
+            </a:r>
+          </a:p>
+        </p:txBody>
+      </p:sp>
+      <p:sp>
+        <p:nvSpPr>
+          <p:cNvPr id="5" name="텍스트"/>
           <p:cNvSpPr txBox="1"/>
           <p:nvPr/>
         </p:nvSpPr>
         <p:spPr>
           <a:xfrm>
-            <a:off x="1440000" y="1418400"/>
-            <a:ext cx="1584000" cy="108000"/>
+            <a:off x="252000" y="1476000"/>
+            <a:ext cx="1800000" cy="133351"/>
           </a:xfrm>
           <a:prstGeom prst="rect">
             <a:avLst/>
@@ -3957,13 +4152,13 @@
           <a:p>
             <a:pPr algn="l">
               <a:lnSpc>
-                <a:spcPts val="1087"/>
+                <a:spcPts val="1015"/>
               </a:lnSpc>
             </a:pPr>
             <a:r>
-              <a:rPr sz="750" b="1" spc="200">
+              <a:rPr sz="700" b="1" spc="200">
                 <a:solidFill>
-                  <a:srgbClr val="567176"/>
+                  <a:srgbClr val="FFFFFF"/>
                 </a:solidFill>
                 <a:latin typeface="맑은 고딕"/>
                 <a:ea typeface="맑은 고딕"/>

--- a/public/fun/cards/finance/finance-24.pptx
+++ b/public/fun/cards/finance/finance-24.pptx
@@ -3099,16 +3099,45 @@
       <p:grpSpPr/>
       <p:sp>
         <p:nvSpPr>
-          <p:cNvPr id="2" name="Oval 1"/>
+          <p:cNvPr id="2" name="Rectangle 1"/>
           <p:cNvSpPr/>
           <p:nvPr/>
         </p:nvSpPr>
         <p:spPr>
           <a:xfrm>
-            <a:off x="2646000" y="234000"/>
-            <a:ext cx="36000" cy="36000"/>
-          </a:xfrm>
-          <a:prstGeom prst="ellipse">
+            <a:off x="0" y="1296000"/>
+            <a:ext cx="3240000" cy="504000"/>
+          </a:xfrm>
+          <a:prstGeom prst="rect">
+            <a:avLst/>
+          </a:prstGeom>
+          <a:solidFill>
+            <a:srgbClr val="FDE1E2"/>
+          </a:solidFill>
+          <a:ln>
+            <a:noFill/>
+          </a:ln>
+        </p:spPr>
+        <p:txBody>
+          <a:bodyPr rtlCol="0" anchor="ctr"/>
+          <a:lstStyle/>
+          <a:p>
+            <a:pPr algn="ctr"/>
+          </a:p>
+        </p:txBody>
+      </p:sp>
+      <p:sp>
+        <p:nvSpPr>
+          <p:cNvPr id="3" name="Rectangle 2"/>
+          <p:cNvSpPr/>
+          <p:nvPr/>
+        </p:nvSpPr>
+        <p:spPr>
+          <a:xfrm>
+            <a:off x="0" y="1296000"/>
+            <a:ext cx="3240000" cy="14400"/>
+          </a:xfrm>
+          <a:prstGeom prst="rect">
             <a:avLst/>
           </a:prstGeom>
           <a:solidFill>
@@ -3128,565 +3157,14 @@
       </p:sp>
       <p:sp>
         <p:nvSpPr>
-          <p:cNvPr id="3" name="Oval 2"/>
-          <p:cNvSpPr/>
-          <p:nvPr/>
-        </p:nvSpPr>
-        <p:spPr>
-          <a:xfrm>
-            <a:off x="2646000" y="334800"/>
-            <a:ext cx="36000" cy="36000"/>
-          </a:xfrm>
-          <a:prstGeom prst="ellipse">
-            <a:avLst/>
-          </a:prstGeom>
-          <a:solidFill>
-            <a:srgbClr val="FDE1E2"/>
-          </a:solidFill>
-          <a:ln>
-            <a:noFill/>
-          </a:ln>
-        </p:spPr>
-        <p:txBody>
-          <a:bodyPr rtlCol="0" anchor="ctr"/>
-          <a:lstStyle/>
-          <a:p>
-            <a:pPr algn="ctr"/>
-          </a:p>
-        </p:txBody>
-      </p:sp>
-      <p:sp>
-        <p:nvSpPr>
-          <p:cNvPr id="4" name="Oval 3"/>
-          <p:cNvSpPr/>
-          <p:nvPr/>
-        </p:nvSpPr>
-        <p:spPr>
-          <a:xfrm>
-            <a:off x="2646000" y="435600"/>
-            <a:ext cx="36000" cy="36000"/>
-          </a:xfrm>
-          <a:prstGeom prst="ellipse">
-            <a:avLst/>
-          </a:prstGeom>
-          <a:solidFill>
-            <a:srgbClr val="FDE1E2"/>
-          </a:solidFill>
-          <a:ln>
-            <a:noFill/>
-          </a:ln>
-        </p:spPr>
-        <p:txBody>
-          <a:bodyPr rtlCol="0" anchor="ctr"/>
-          <a:lstStyle/>
-          <a:p>
-            <a:pPr algn="ctr"/>
-          </a:p>
-        </p:txBody>
-      </p:sp>
-      <p:sp>
-        <p:nvSpPr>
-          <p:cNvPr id="5" name="Oval 4"/>
-          <p:cNvSpPr/>
-          <p:nvPr/>
-        </p:nvSpPr>
-        <p:spPr>
-          <a:xfrm>
-            <a:off x="2646000" y="536400"/>
-            <a:ext cx="36000" cy="36000"/>
-          </a:xfrm>
-          <a:prstGeom prst="ellipse">
-            <a:avLst/>
-          </a:prstGeom>
-          <a:solidFill>
-            <a:srgbClr val="F0262F"/>
-          </a:solidFill>
-          <a:ln>
-            <a:noFill/>
-          </a:ln>
-        </p:spPr>
-        <p:txBody>
-          <a:bodyPr rtlCol="0" anchor="ctr"/>
-          <a:lstStyle/>
-          <a:p>
-            <a:pPr algn="ctr"/>
-          </a:p>
-        </p:txBody>
-      </p:sp>
-      <p:sp>
-        <p:nvSpPr>
-          <p:cNvPr id="6" name="Oval 5"/>
-          <p:cNvSpPr/>
-          <p:nvPr/>
-        </p:nvSpPr>
-        <p:spPr>
-          <a:xfrm>
-            <a:off x="2746800" y="234000"/>
-            <a:ext cx="36000" cy="36000"/>
-          </a:xfrm>
-          <a:prstGeom prst="ellipse">
-            <a:avLst/>
-          </a:prstGeom>
-          <a:solidFill>
-            <a:srgbClr val="FDE1E2"/>
-          </a:solidFill>
-          <a:ln>
-            <a:noFill/>
-          </a:ln>
-        </p:spPr>
-        <p:txBody>
-          <a:bodyPr rtlCol="0" anchor="ctr"/>
-          <a:lstStyle/>
-          <a:p>
-            <a:pPr algn="ctr"/>
-          </a:p>
-        </p:txBody>
-      </p:sp>
-      <p:sp>
-        <p:nvSpPr>
-          <p:cNvPr id="7" name="Oval 6"/>
-          <p:cNvSpPr/>
-          <p:nvPr/>
-        </p:nvSpPr>
-        <p:spPr>
-          <a:xfrm>
-            <a:off x="2746800" y="334800"/>
-            <a:ext cx="36000" cy="36000"/>
-          </a:xfrm>
-          <a:prstGeom prst="ellipse">
-            <a:avLst/>
-          </a:prstGeom>
-          <a:solidFill>
-            <a:srgbClr val="FDE1E2"/>
-          </a:solidFill>
-          <a:ln>
-            <a:noFill/>
-          </a:ln>
-        </p:spPr>
-        <p:txBody>
-          <a:bodyPr rtlCol="0" anchor="ctr"/>
-          <a:lstStyle/>
-          <a:p>
-            <a:pPr algn="ctr"/>
-          </a:p>
-        </p:txBody>
-      </p:sp>
-      <p:sp>
-        <p:nvSpPr>
-          <p:cNvPr id="8" name="Oval 7"/>
-          <p:cNvSpPr/>
-          <p:nvPr/>
-        </p:nvSpPr>
-        <p:spPr>
-          <a:xfrm>
-            <a:off x="2746800" y="435600"/>
-            <a:ext cx="36000" cy="36000"/>
-          </a:xfrm>
-          <a:prstGeom prst="ellipse">
-            <a:avLst/>
-          </a:prstGeom>
-          <a:solidFill>
-            <a:srgbClr val="F0262F"/>
-          </a:solidFill>
-          <a:ln>
-            <a:noFill/>
-          </a:ln>
-        </p:spPr>
-        <p:txBody>
-          <a:bodyPr rtlCol="0" anchor="ctr"/>
-          <a:lstStyle/>
-          <a:p>
-            <a:pPr algn="ctr"/>
-          </a:p>
-        </p:txBody>
-      </p:sp>
-      <p:sp>
-        <p:nvSpPr>
-          <p:cNvPr id="9" name="Oval 8"/>
-          <p:cNvSpPr/>
-          <p:nvPr/>
-        </p:nvSpPr>
-        <p:spPr>
-          <a:xfrm>
-            <a:off x="2746800" y="536400"/>
-            <a:ext cx="36000" cy="36000"/>
-          </a:xfrm>
-          <a:prstGeom prst="ellipse">
-            <a:avLst/>
-          </a:prstGeom>
-          <a:solidFill>
-            <a:srgbClr val="FDE1E2"/>
-          </a:solidFill>
-          <a:ln>
-            <a:noFill/>
-          </a:ln>
-        </p:spPr>
-        <p:txBody>
-          <a:bodyPr rtlCol="0" anchor="ctr"/>
-          <a:lstStyle/>
-          <a:p>
-            <a:pPr algn="ctr"/>
-          </a:p>
-        </p:txBody>
-      </p:sp>
-      <p:sp>
-        <p:nvSpPr>
-          <p:cNvPr id="10" name="Oval 9"/>
-          <p:cNvSpPr/>
-          <p:nvPr/>
-        </p:nvSpPr>
-        <p:spPr>
-          <a:xfrm>
-            <a:off x="2847600" y="234000"/>
-            <a:ext cx="36000" cy="36000"/>
-          </a:xfrm>
-          <a:prstGeom prst="ellipse">
-            <a:avLst/>
-          </a:prstGeom>
-          <a:solidFill>
-            <a:srgbClr val="FDE1E2"/>
-          </a:solidFill>
-          <a:ln>
-            <a:noFill/>
-          </a:ln>
-        </p:spPr>
-        <p:txBody>
-          <a:bodyPr rtlCol="0" anchor="ctr"/>
-          <a:lstStyle/>
-          <a:p>
-            <a:pPr algn="ctr"/>
-          </a:p>
-        </p:txBody>
-      </p:sp>
-      <p:sp>
-        <p:nvSpPr>
-          <p:cNvPr id="11" name="Oval 10"/>
-          <p:cNvSpPr/>
-          <p:nvPr/>
-        </p:nvSpPr>
-        <p:spPr>
-          <a:xfrm>
-            <a:off x="2847600" y="334800"/>
-            <a:ext cx="36000" cy="36000"/>
-          </a:xfrm>
-          <a:prstGeom prst="ellipse">
-            <a:avLst/>
-          </a:prstGeom>
-          <a:solidFill>
-            <a:srgbClr val="F0262F"/>
-          </a:solidFill>
-          <a:ln>
-            <a:noFill/>
-          </a:ln>
-        </p:spPr>
-        <p:txBody>
-          <a:bodyPr rtlCol="0" anchor="ctr"/>
-          <a:lstStyle/>
-          <a:p>
-            <a:pPr algn="ctr"/>
-          </a:p>
-        </p:txBody>
-      </p:sp>
-      <p:sp>
-        <p:nvSpPr>
-          <p:cNvPr id="12" name="Oval 11"/>
-          <p:cNvSpPr/>
-          <p:nvPr/>
-        </p:nvSpPr>
-        <p:spPr>
-          <a:xfrm>
-            <a:off x="2847600" y="435600"/>
-            <a:ext cx="36000" cy="36000"/>
-          </a:xfrm>
-          <a:prstGeom prst="ellipse">
-            <a:avLst/>
-          </a:prstGeom>
-          <a:solidFill>
-            <a:srgbClr val="FDE1E2"/>
-          </a:solidFill>
-          <a:ln>
-            <a:noFill/>
-          </a:ln>
-        </p:spPr>
-        <p:txBody>
-          <a:bodyPr rtlCol="0" anchor="ctr"/>
-          <a:lstStyle/>
-          <a:p>
-            <a:pPr algn="ctr"/>
-          </a:p>
-        </p:txBody>
-      </p:sp>
-      <p:sp>
-        <p:nvSpPr>
-          <p:cNvPr id="13" name="Oval 12"/>
-          <p:cNvSpPr/>
-          <p:nvPr/>
-        </p:nvSpPr>
-        <p:spPr>
-          <a:xfrm>
-            <a:off x="2847600" y="536400"/>
-            <a:ext cx="36000" cy="36000"/>
-          </a:xfrm>
-          <a:prstGeom prst="ellipse">
-            <a:avLst/>
-          </a:prstGeom>
-          <a:solidFill>
-            <a:srgbClr val="FDE1E2"/>
-          </a:solidFill>
-          <a:ln>
-            <a:noFill/>
-          </a:ln>
-        </p:spPr>
-        <p:txBody>
-          <a:bodyPr rtlCol="0" anchor="ctr"/>
-          <a:lstStyle/>
-          <a:p>
-            <a:pPr algn="ctr"/>
-          </a:p>
-        </p:txBody>
-      </p:sp>
-      <p:sp>
-        <p:nvSpPr>
-          <p:cNvPr id="14" name="Oval 13"/>
-          <p:cNvSpPr/>
-          <p:nvPr/>
-        </p:nvSpPr>
-        <p:spPr>
-          <a:xfrm>
-            <a:off x="2948400" y="234000"/>
-            <a:ext cx="36000" cy="36000"/>
-          </a:xfrm>
-          <a:prstGeom prst="ellipse">
-            <a:avLst/>
-          </a:prstGeom>
-          <a:solidFill>
-            <a:srgbClr val="F0262F"/>
-          </a:solidFill>
-          <a:ln>
-            <a:noFill/>
-          </a:ln>
-        </p:spPr>
-        <p:txBody>
-          <a:bodyPr rtlCol="0" anchor="ctr"/>
-          <a:lstStyle/>
-          <a:p>
-            <a:pPr algn="ctr"/>
-          </a:p>
-        </p:txBody>
-      </p:sp>
-      <p:sp>
-        <p:nvSpPr>
-          <p:cNvPr id="15" name="Oval 14"/>
-          <p:cNvSpPr/>
-          <p:nvPr/>
-        </p:nvSpPr>
-        <p:spPr>
-          <a:xfrm>
-            <a:off x="2948400" y="334800"/>
-            <a:ext cx="36000" cy="36000"/>
-          </a:xfrm>
-          <a:prstGeom prst="ellipse">
-            <a:avLst/>
-          </a:prstGeom>
-          <a:solidFill>
-            <a:srgbClr val="FDE1E2"/>
-          </a:solidFill>
-          <a:ln>
-            <a:noFill/>
-          </a:ln>
-        </p:spPr>
-        <p:txBody>
-          <a:bodyPr rtlCol="0" anchor="ctr"/>
-          <a:lstStyle/>
-          <a:p>
-            <a:pPr algn="ctr"/>
-          </a:p>
-        </p:txBody>
-      </p:sp>
-      <p:sp>
-        <p:nvSpPr>
-          <p:cNvPr id="16" name="Oval 15"/>
-          <p:cNvSpPr/>
-          <p:nvPr/>
-        </p:nvSpPr>
-        <p:spPr>
-          <a:xfrm>
-            <a:off x="2948400" y="435600"/>
-            <a:ext cx="36000" cy="36000"/>
-          </a:xfrm>
-          <a:prstGeom prst="ellipse">
-            <a:avLst/>
-          </a:prstGeom>
-          <a:solidFill>
-            <a:srgbClr val="FDE1E2"/>
-          </a:solidFill>
-          <a:ln>
-            <a:noFill/>
-          </a:ln>
-        </p:spPr>
-        <p:txBody>
-          <a:bodyPr rtlCol="0" anchor="ctr"/>
-          <a:lstStyle/>
-          <a:p>
-            <a:pPr algn="ctr"/>
-          </a:p>
-        </p:txBody>
-      </p:sp>
-      <p:sp>
-        <p:nvSpPr>
-          <p:cNvPr id="17" name="Oval 16"/>
-          <p:cNvSpPr/>
-          <p:nvPr/>
-        </p:nvSpPr>
-        <p:spPr>
-          <a:xfrm>
-            <a:off x="2948400" y="536400"/>
-            <a:ext cx="36000" cy="36000"/>
-          </a:xfrm>
-          <a:prstGeom prst="ellipse">
-            <a:avLst/>
-          </a:prstGeom>
-          <a:solidFill>
-            <a:srgbClr val="F0262F"/>
-          </a:solidFill>
-          <a:ln>
-            <a:noFill/>
-          </a:ln>
-        </p:spPr>
-        <p:txBody>
-          <a:bodyPr rtlCol="0" anchor="ctr"/>
-          <a:lstStyle/>
-          <a:p>
-            <a:pPr algn="ctr"/>
-          </a:p>
-        </p:txBody>
-      </p:sp>
-      <p:sp>
-        <p:nvSpPr>
-          <p:cNvPr id="18" name="Oval 17"/>
-          <p:cNvSpPr/>
-          <p:nvPr/>
-        </p:nvSpPr>
-        <p:spPr>
-          <a:xfrm>
-            <a:off x="3049200" y="234000"/>
-            <a:ext cx="36000" cy="36000"/>
-          </a:xfrm>
-          <a:prstGeom prst="ellipse">
-            <a:avLst/>
-          </a:prstGeom>
-          <a:solidFill>
-            <a:srgbClr val="FDE1E2"/>
-          </a:solidFill>
-          <a:ln>
-            <a:noFill/>
-          </a:ln>
-        </p:spPr>
-        <p:txBody>
-          <a:bodyPr rtlCol="0" anchor="ctr"/>
-          <a:lstStyle/>
-          <a:p>
-            <a:pPr algn="ctr"/>
-          </a:p>
-        </p:txBody>
-      </p:sp>
-      <p:sp>
-        <p:nvSpPr>
-          <p:cNvPr id="19" name="Oval 18"/>
-          <p:cNvSpPr/>
-          <p:nvPr/>
-        </p:nvSpPr>
-        <p:spPr>
-          <a:xfrm>
-            <a:off x="3049200" y="334800"/>
-            <a:ext cx="36000" cy="36000"/>
-          </a:xfrm>
-          <a:prstGeom prst="ellipse">
-            <a:avLst/>
-          </a:prstGeom>
-          <a:solidFill>
-            <a:srgbClr val="FDE1E2"/>
-          </a:solidFill>
-          <a:ln>
-            <a:noFill/>
-          </a:ln>
-        </p:spPr>
-        <p:txBody>
-          <a:bodyPr rtlCol="0" anchor="ctr"/>
-          <a:lstStyle/>
-          <a:p>
-            <a:pPr algn="ctr"/>
-          </a:p>
-        </p:txBody>
-      </p:sp>
-      <p:sp>
-        <p:nvSpPr>
-          <p:cNvPr id="20" name="Oval 19"/>
-          <p:cNvSpPr/>
-          <p:nvPr/>
-        </p:nvSpPr>
-        <p:spPr>
-          <a:xfrm>
-            <a:off x="3049200" y="435600"/>
-            <a:ext cx="36000" cy="36000"/>
-          </a:xfrm>
-          <a:prstGeom prst="ellipse">
-            <a:avLst/>
-          </a:prstGeom>
-          <a:solidFill>
-            <a:srgbClr val="F0262F"/>
-          </a:solidFill>
-          <a:ln>
-            <a:noFill/>
-          </a:ln>
-        </p:spPr>
-        <p:txBody>
-          <a:bodyPr rtlCol="0" anchor="ctr"/>
-          <a:lstStyle/>
-          <a:p>
-            <a:pPr algn="ctr"/>
-          </a:p>
-        </p:txBody>
-      </p:sp>
-      <p:sp>
-        <p:nvSpPr>
-          <p:cNvPr id="21" name="Oval 20"/>
-          <p:cNvSpPr/>
-          <p:nvPr/>
-        </p:nvSpPr>
-        <p:spPr>
-          <a:xfrm>
-            <a:off x="3049200" y="536400"/>
-            <a:ext cx="36000" cy="36000"/>
-          </a:xfrm>
-          <a:prstGeom prst="ellipse">
-            <a:avLst/>
-          </a:prstGeom>
-          <a:solidFill>
-            <a:srgbClr val="FDE1E2"/>
-          </a:solidFill>
-          <a:ln>
-            <a:noFill/>
-          </a:ln>
-        </p:spPr>
-        <p:txBody>
-          <a:bodyPr rtlCol="0" anchor="ctr"/>
-          <a:lstStyle/>
-          <a:p>
-            <a:pPr algn="ctr"/>
-          </a:p>
-        </p:txBody>
-      </p:sp>
-      <p:sp>
-        <p:nvSpPr>
-          <p:cNvPr id="22" name="텍스트"/>
+          <p:cNvPr id="4" name="텍스트"/>
           <p:cNvSpPr txBox="1"/>
           <p:nvPr/>
         </p:nvSpPr>
         <p:spPr>
           <a:xfrm>
-            <a:off x="252000" y="223200"/>
-            <a:ext cx="1440000" cy="133351"/>
+            <a:off x="252000" y="252000"/>
+            <a:ext cx="1512000" cy="123826"/>
           </a:xfrm>
           <a:prstGeom prst="rect">
             <a:avLst/>
@@ -3701,11 +3179,11 @@
           <a:p>
             <a:pPr algn="l">
               <a:lnSpc>
-                <a:spcPts val="1015"/>
+                <a:spcPts val="942"/>
               </a:lnSpc>
             </a:pPr>
             <a:r>
-              <a:rPr sz="700" b="1" spc="200">
+              <a:rPr sz="650" b="1" spc="220">
                 <a:solidFill>
                   <a:srgbClr val="6B7280"/>
                 </a:solidFill>
@@ -3719,14 +3197,14 @@
       </p:sp>
       <p:sp>
         <p:nvSpPr>
-          <p:cNvPr id="23" name="텍스트"/>
+          <p:cNvPr id="5" name="텍스트"/>
           <p:cNvSpPr txBox="1"/>
           <p:nvPr/>
         </p:nvSpPr>
         <p:spPr>
           <a:xfrm>
-            <a:off x="252000" y="770400"/>
-            <a:ext cx="2016000" cy="360000"/>
+            <a:off x="252000" y="576000"/>
+            <a:ext cx="1800000" cy="237600"/>
           </a:xfrm>
           <a:prstGeom prst="rect">
             <a:avLst/>
@@ -3741,11 +3219,11 @@
           <a:p>
             <a:pPr algn="l">
               <a:lnSpc>
-                <a:spcPts val="3190"/>
+                <a:spcPts val="1957"/>
               </a:lnSpc>
             </a:pPr>
             <a:r>
-              <a:rPr sz="2200" b="1">
+              <a:rPr sz="1350" b="1" spc="120">
                 <a:solidFill>
                   <a:srgbClr val="12151C"/>
                 </a:solidFill>
@@ -3759,14 +3237,14 @@
       </p:sp>
       <p:sp>
         <p:nvSpPr>
-          <p:cNvPr id="24" name="텍스트"/>
+          <p:cNvPr id="6" name="텍스트"/>
           <p:cNvSpPr txBox="1"/>
           <p:nvPr/>
         </p:nvSpPr>
         <p:spPr>
           <a:xfrm>
-            <a:off x="252000" y="1173600"/>
-            <a:ext cx="2016000" cy="171451"/>
+            <a:off x="252000" y="828000"/>
+            <a:ext cx="1800000" cy="133351"/>
           </a:xfrm>
           <a:prstGeom prst="rect">
             <a:avLst/>
@@ -3781,11 +3259,11 @@
           <a:p>
             <a:pPr algn="l">
               <a:lnSpc>
-                <a:spcPts val="1305"/>
+                <a:spcPts val="1015"/>
               </a:lnSpc>
             </a:pPr>
             <a:r>
-              <a:rPr sz="900" b="0">
+              <a:rPr sz="700" b="0" spc="60">
                 <a:solidFill>
                   <a:srgbClr val="6B7280"/>
                 </a:solidFill>
@@ -3799,14 +3277,14 @@
       </p:sp>
       <p:sp>
         <p:nvSpPr>
-          <p:cNvPr id="25" name="텍스트"/>
+          <p:cNvPr id="7" name="텍스트"/>
           <p:cNvSpPr txBox="1"/>
           <p:nvPr/>
         </p:nvSpPr>
         <p:spPr>
           <a:xfrm>
-            <a:off x="1620000" y="1339200"/>
-            <a:ext cx="1368000" cy="133351"/>
+            <a:off x="252000" y="1411200"/>
+            <a:ext cx="900000" cy="91441"/>
           </a:xfrm>
           <a:prstGeom prst="rect">
             <a:avLst/>
@@ -3819,13 +3297,53 @@
           </a:bodyPr>
           <a:lstStyle/>
           <a:p>
-            <a:pPr algn="r">
+            <a:pPr algn="l">
               <a:lnSpc>
-                <a:spcPts val="1015"/>
+                <a:spcPts val="696"/>
               </a:lnSpc>
             </a:pPr>
             <a:r>
-              <a:rPr sz="700" b="0">
+              <a:rPr sz="480" b="1" spc="140">
+                <a:solidFill>
+                  <a:srgbClr val="6B7280"/>
+                </a:solidFill>
+                <a:latin typeface="맑은 고딕"/>
+                <a:ea typeface="맑은 고딕"/>
+              </a:rPr>
+              <a:t>TEL</a:t>
+            </a:r>
+          </a:p>
+        </p:txBody>
+      </p:sp>
+      <p:sp>
+        <p:nvSpPr>
+          <p:cNvPr id="8" name="텍스트"/>
+          <p:cNvSpPr txBox="1"/>
+          <p:nvPr/>
+        </p:nvSpPr>
+        <p:spPr>
+          <a:xfrm>
+            <a:off x="252000" y="1512000"/>
+            <a:ext cx="900000" cy="120016"/>
+          </a:xfrm>
+          <a:prstGeom prst="rect">
+            <a:avLst/>
+          </a:prstGeom>
+          <a:noFill/>
+        </p:spPr>
+        <p:txBody>
+          <a:bodyPr wrap="square" lIns="0" rIns="0" tIns="0" bIns="0" anchor="t">
+            <a:spAutoFit/>
+          </a:bodyPr>
+          <a:lstStyle/>
+          <a:p>
+            <a:pPr algn="l">
+              <a:lnSpc>
+                <a:spcPts val="913"/>
+              </a:lnSpc>
+            </a:pPr>
+            <a:r>
+              <a:rPr sz="630" b="0">
                 <a:solidFill>
                   <a:srgbClr val="12151C"/>
                 </a:solidFill>
@@ -3837,16 +3355,37 @@
           </a:p>
         </p:txBody>
       </p:sp>
-      <p:sp>
-        <p:nvSpPr>
-          <p:cNvPr id="26" name="텍스트"/>
+      <p:cxnSp>
+        <p:nvCxnSpPr>
+          <p:cNvPr id="9" name="Connector 8"/>
+          <p:cNvCxnSpPr/>
+          <p:nvPr/>
+        </p:nvCxnSpPr>
+        <p:spPr>
+          <a:xfrm>
+            <a:off x="1072800" y="1411200"/>
+            <a:ext cx="0" cy="201600"/>
+          </a:xfrm>
+          <a:prstGeom prst="line">
+            <a:avLst/>
+          </a:prstGeom>
+          <a:ln w="3600">
+            <a:solidFill>
+              <a:srgbClr val="E3E5E9"/>
+            </a:solidFill>
+          </a:ln>
+        </p:spPr>
+      </p:cxnSp>
+      <p:sp>
+        <p:nvSpPr>
+          <p:cNvPr id="10" name="텍스트"/>
           <p:cNvSpPr txBox="1"/>
           <p:nvPr/>
         </p:nvSpPr>
         <p:spPr>
           <a:xfrm>
-            <a:off x="1620000" y="1476000"/>
-            <a:ext cx="1368000" cy="133351"/>
+            <a:off x="1152000" y="1411200"/>
+            <a:ext cx="1008000" cy="91441"/>
           </a:xfrm>
           <a:prstGeom prst="rect">
             <a:avLst/>
@@ -3859,13 +3398,53 @@
           </a:bodyPr>
           <a:lstStyle/>
           <a:p>
-            <a:pPr algn="r">
+            <a:pPr algn="l">
               <a:lnSpc>
-                <a:spcPts val="1015"/>
+                <a:spcPts val="696"/>
               </a:lnSpc>
             </a:pPr>
             <a:r>
-              <a:rPr sz="700" b="0">
+              <a:rPr sz="480" b="1" spc="140">
+                <a:solidFill>
+                  <a:srgbClr val="6B7280"/>
+                </a:solidFill>
+                <a:latin typeface="맑은 고딕"/>
+                <a:ea typeface="맑은 고딕"/>
+              </a:rPr>
+              <a:t>MAIL</a:t>
+            </a:r>
+          </a:p>
+        </p:txBody>
+      </p:sp>
+      <p:sp>
+        <p:nvSpPr>
+          <p:cNvPr id="11" name="텍스트"/>
+          <p:cNvSpPr txBox="1"/>
+          <p:nvPr/>
+        </p:nvSpPr>
+        <p:spPr>
+          <a:xfrm>
+            <a:off x="1152000" y="1512000"/>
+            <a:ext cx="1008000" cy="120016"/>
+          </a:xfrm>
+          <a:prstGeom prst="rect">
+            <a:avLst/>
+          </a:prstGeom>
+          <a:noFill/>
+        </p:spPr>
+        <p:txBody>
+          <a:bodyPr wrap="square" lIns="0" rIns="0" tIns="0" bIns="0" anchor="t">
+            <a:spAutoFit/>
+          </a:bodyPr>
+          <a:lstStyle/>
+          <a:p>
+            <a:pPr algn="l">
+              <a:lnSpc>
+                <a:spcPts val="913"/>
+              </a:lnSpc>
+            </a:pPr>
+            <a:r>
+              <a:rPr sz="630" b="0">
                 <a:solidFill>
                   <a:srgbClr val="12151C"/>
                 </a:solidFill>
@@ -3877,16 +3456,37 @@
           </a:p>
         </p:txBody>
       </p:sp>
-      <p:sp>
-        <p:nvSpPr>
-          <p:cNvPr id="27" name="텍스트"/>
+      <p:cxnSp>
+        <p:nvCxnSpPr>
+          <p:cNvPr id="12" name="Connector 11"/>
+          <p:cNvCxnSpPr/>
+          <p:nvPr/>
+        </p:nvCxnSpPr>
+        <p:spPr>
+          <a:xfrm>
+            <a:off x="2080800" y="1411200"/>
+            <a:ext cx="0" cy="201600"/>
+          </a:xfrm>
+          <a:prstGeom prst="line">
+            <a:avLst/>
+          </a:prstGeom>
+          <a:ln w="3600">
+            <a:solidFill>
+              <a:srgbClr val="E3E5E9"/>
+            </a:solidFill>
+          </a:ln>
+        </p:spPr>
+      </p:cxnSp>
+      <p:sp>
+        <p:nvSpPr>
+          <p:cNvPr id="13" name="텍스트"/>
           <p:cNvSpPr txBox="1"/>
           <p:nvPr/>
         </p:nvSpPr>
         <p:spPr>
           <a:xfrm>
-            <a:off x="1620000" y="1612800"/>
-            <a:ext cx="1368000" cy="133351"/>
+            <a:off x="2160000" y="1411200"/>
+            <a:ext cx="972000" cy="91441"/>
           </a:xfrm>
           <a:prstGeom prst="rect">
             <a:avLst/>
@@ -3899,13 +3499,53 @@
           </a:bodyPr>
           <a:lstStyle/>
           <a:p>
-            <a:pPr algn="r">
+            <a:pPr algn="l">
               <a:lnSpc>
-                <a:spcPts val="1015"/>
+                <a:spcPts val="696"/>
               </a:lnSpc>
             </a:pPr>
             <a:r>
-              <a:rPr sz="700" b="0">
+              <a:rPr sz="480" b="1" spc="140">
+                <a:solidFill>
+                  <a:srgbClr val="6B7280"/>
+                </a:solidFill>
+                <a:latin typeface="맑은 고딕"/>
+                <a:ea typeface="맑은 고딕"/>
+              </a:rPr>
+              <a:t>ADDR</a:t>
+            </a:r>
+          </a:p>
+        </p:txBody>
+      </p:sp>
+      <p:sp>
+        <p:nvSpPr>
+          <p:cNvPr id="14" name="텍스트"/>
+          <p:cNvSpPr txBox="1"/>
+          <p:nvPr/>
+        </p:nvSpPr>
+        <p:spPr>
+          <a:xfrm>
+            <a:off x="2160000" y="1512000"/>
+            <a:ext cx="972000" cy="120016"/>
+          </a:xfrm>
+          <a:prstGeom prst="rect">
+            <a:avLst/>
+          </a:prstGeom>
+          <a:noFill/>
+        </p:spPr>
+        <p:txBody>
+          <a:bodyPr wrap="square" lIns="0" rIns="0" tIns="0" bIns="0" anchor="t">
+            <a:spAutoFit/>
+          </a:bodyPr>
+          <a:lstStyle/>
+          <a:p>
+            <a:pPr algn="l">
+              <a:lnSpc>
+                <a:spcPts val="913"/>
+              </a:lnSpc>
+            </a:pPr>
+            <a:r>
+              <a:rPr sz="630" b="0">
                 <a:solidFill>
                   <a:srgbClr val="12151C"/>
                 </a:solidFill>
@@ -3945,14 +3585,54 @@
       <p:grpSpPr/>
       <p:sp>
         <p:nvSpPr>
-          <p:cNvPr id="2" name="Rectangle 1"/>
+          <p:cNvPr id="2" name="텍스트"/>
+          <p:cNvSpPr txBox="1"/>
+          <p:nvPr/>
+        </p:nvSpPr>
+        <p:spPr>
+          <a:xfrm>
+            <a:off x="252000" y="252000"/>
+            <a:ext cx="1080000" cy="99061"/>
+          </a:xfrm>
+          <a:prstGeom prst="rect">
+            <a:avLst/>
+          </a:prstGeom>
+          <a:noFill/>
+        </p:spPr>
+        <p:txBody>
+          <a:bodyPr wrap="square" lIns="0" rIns="0" tIns="0" bIns="0" anchor="t">
+            <a:spAutoFit/>
+          </a:bodyPr>
+          <a:lstStyle/>
+          <a:p>
+            <a:pPr algn="l">
+              <a:lnSpc>
+                <a:spcPts val="754"/>
+              </a:lnSpc>
+            </a:pPr>
+            <a:r>
+              <a:rPr sz="520" b="1" spc="240">
+                <a:solidFill>
+                  <a:srgbClr val="6B7280"/>
+                </a:solidFill>
+                <a:latin typeface="맑은 고딕"/>
+                <a:ea typeface="맑은 고딕"/>
+              </a:rPr>
+              <a:t>상담 분야</a:t>
+            </a:r>
+          </a:p>
+        </p:txBody>
+      </p:sp>
+      <p:sp>
+        <p:nvSpPr>
+          <p:cNvPr id="3" name="Rectangle 2"/>
           <p:cNvSpPr/>
           <p:nvPr/>
         </p:nvSpPr>
         <p:spPr>
           <a:xfrm>
-            <a:off x="0" y="0"/>
-            <a:ext cx="3240000" cy="1800000"/>
+            <a:off x="252000" y="352800"/>
+            <a:ext cx="108000" cy="14400"/>
           </a:xfrm>
           <a:prstGeom prst="rect">
             <a:avLst/>
@@ -3972,109 +3652,447 @@
           </a:p>
         </p:txBody>
       </p:sp>
-      <p:sp>
-        <p:nvSpPr>
-          <p:cNvPr id="3" name="Freeform 2"/>
+      <p:cxnSp>
+        <p:nvCxnSpPr>
+          <p:cNvPr id="4" name="Connector 3"/>
+          <p:cNvCxnSpPr/>
+          <p:nvPr/>
+        </p:nvCxnSpPr>
+        <p:spPr>
+          <a:xfrm>
+            <a:off x="252000" y="453600"/>
+            <a:ext cx="1512000" cy="0"/>
+          </a:xfrm>
+          <a:prstGeom prst="line">
+            <a:avLst/>
+          </a:prstGeom>
+          <a:ln w="3600">
+            <a:solidFill>
+              <a:srgbClr val="E3E5E9"/>
+            </a:solidFill>
+          </a:ln>
+        </p:spPr>
+      </p:cxnSp>
+      <p:sp>
+        <p:nvSpPr>
+          <p:cNvPr id="5" name="텍스트"/>
+          <p:cNvSpPr txBox="1"/>
+          <p:nvPr/>
+        </p:nvSpPr>
+        <p:spPr>
+          <a:xfrm>
+            <a:off x="252000" y="507600"/>
+            <a:ext cx="216000" cy="95251"/>
+          </a:xfrm>
+          <a:prstGeom prst="rect">
+            <a:avLst/>
+          </a:prstGeom>
+          <a:noFill/>
+        </p:spPr>
+        <p:txBody>
+          <a:bodyPr wrap="square" lIns="0" rIns="0" tIns="0" bIns="0" anchor="t">
+            <a:spAutoFit/>
+          </a:bodyPr>
+          <a:lstStyle/>
+          <a:p>
+            <a:pPr algn="l">
+              <a:lnSpc>
+                <a:spcPts val="725"/>
+              </a:lnSpc>
+            </a:pPr>
+            <a:r>
+              <a:rPr sz="500" b="1" spc="100">
+                <a:solidFill>
+                  <a:srgbClr val="6B7280"/>
+                </a:solidFill>
+                <a:latin typeface="맑은 고딕"/>
+                <a:ea typeface="맑은 고딕"/>
+              </a:rPr>
+              <a:t>01</a:t>
+            </a:r>
+          </a:p>
+        </p:txBody>
+      </p:sp>
+      <p:sp>
+        <p:nvSpPr>
+          <p:cNvPr id="6" name="텍스트"/>
+          <p:cNvSpPr txBox="1"/>
+          <p:nvPr/>
+        </p:nvSpPr>
+        <p:spPr>
+          <a:xfrm>
+            <a:off x="489600" y="496800"/>
+            <a:ext cx="1260000" cy="133351"/>
+          </a:xfrm>
+          <a:prstGeom prst="rect">
+            <a:avLst/>
+          </a:prstGeom>
+          <a:noFill/>
+        </p:spPr>
+        <p:txBody>
+          <a:bodyPr wrap="square" lIns="0" rIns="0" tIns="0" bIns="0" anchor="t">
+            <a:spAutoFit/>
+          </a:bodyPr>
+          <a:lstStyle/>
+          <a:p>
+            <a:pPr algn="l">
+              <a:lnSpc>
+                <a:spcPts val="1015"/>
+              </a:lnSpc>
+            </a:pPr>
+            <a:r>
+              <a:rPr sz="700" b="0">
+                <a:solidFill>
+                  <a:srgbClr val="12151C"/>
+                </a:solidFill>
+                <a:latin typeface="맑은 고딕"/>
+                <a:ea typeface="맑은 고딕"/>
+              </a:rPr>
+              <a:t>보험 상담</a:t>
+            </a:r>
+          </a:p>
+        </p:txBody>
+      </p:sp>
+      <p:cxnSp>
+        <p:nvCxnSpPr>
+          <p:cNvPr id="7" name="Connector 6"/>
+          <p:cNvCxnSpPr/>
+          <p:nvPr/>
+        </p:nvCxnSpPr>
+        <p:spPr>
+          <a:xfrm>
+            <a:off x="252000" y="640800"/>
+            <a:ext cx="1512000" cy="0"/>
+          </a:xfrm>
+          <a:prstGeom prst="line">
+            <a:avLst/>
+          </a:prstGeom>
+          <a:ln w="3600">
+            <a:solidFill>
+              <a:srgbClr val="E3E5E9"/>
+            </a:solidFill>
+          </a:ln>
+        </p:spPr>
+      </p:cxnSp>
+      <p:sp>
+        <p:nvSpPr>
+          <p:cNvPr id="8" name="텍스트"/>
+          <p:cNvSpPr txBox="1"/>
+          <p:nvPr/>
+        </p:nvSpPr>
+        <p:spPr>
+          <a:xfrm>
+            <a:off x="252000" y="694800"/>
+            <a:ext cx="216000" cy="95251"/>
+          </a:xfrm>
+          <a:prstGeom prst="rect">
+            <a:avLst/>
+          </a:prstGeom>
+          <a:noFill/>
+        </p:spPr>
+        <p:txBody>
+          <a:bodyPr wrap="square" lIns="0" rIns="0" tIns="0" bIns="0" anchor="t">
+            <a:spAutoFit/>
+          </a:bodyPr>
+          <a:lstStyle/>
+          <a:p>
+            <a:pPr algn="l">
+              <a:lnSpc>
+                <a:spcPts val="725"/>
+              </a:lnSpc>
+            </a:pPr>
+            <a:r>
+              <a:rPr sz="500" b="1" spc="100">
+                <a:solidFill>
+                  <a:srgbClr val="6B7280"/>
+                </a:solidFill>
+                <a:latin typeface="맑은 고딕"/>
+                <a:ea typeface="맑은 고딕"/>
+              </a:rPr>
+              <a:t>02</a:t>
+            </a:r>
+          </a:p>
+        </p:txBody>
+      </p:sp>
+      <p:sp>
+        <p:nvSpPr>
+          <p:cNvPr id="9" name="텍스트"/>
+          <p:cNvSpPr txBox="1"/>
+          <p:nvPr/>
+        </p:nvSpPr>
+        <p:spPr>
+          <a:xfrm>
+            <a:off x="489600" y="684000"/>
+            <a:ext cx="1260000" cy="133351"/>
+          </a:xfrm>
+          <a:prstGeom prst="rect">
+            <a:avLst/>
+          </a:prstGeom>
+          <a:noFill/>
+        </p:spPr>
+        <p:txBody>
+          <a:bodyPr wrap="square" lIns="0" rIns="0" tIns="0" bIns="0" anchor="t">
+            <a:spAutoFit/>
+          </a:bodyPr>
+          <a:lstStyle/>
+          <a:p>
+            <a:pPr algn="l">
+              <a:lnSpc>
+                <a:spcPts val="1015"/>
+              </a:lnSpc>
+            </a:pPr>
+            <a:r>
+              <a:rPr sz="700" b="0">
+                <a:solidFill>
+                  <a:srgbClr val="12151C"/>
+                </a:solidFill>
+                <a:latin typeface="맑은 고딕"/>
+                <a:ea typeface="맑은 고딕"/>
+              </a:rPr>
+              <a:t>가입 점검</a:t>
+            </a:r>
+          </a:p>
+        </p:txBody>
+      </p:sp>
+      <p:cxnSp>
+        <p:nvCxnSpPr>
+          <p:cNvPr id="10" name="Connector 9"/>
+          <p:cNvCxnSpPr/>
+          <p:nvPr/>
+        </p:nvCxnSpPr>
+        <p:spPr>
+          <a:xfrm>
+            <a:off x="252000" y="828000"/>
+            <a:ext cx="1512000" cy="0"/>
+          </a:xfrm>
+          <a:prstGeom prst="line">
+            <a:avLst/>
+          </a:prstGeom>
+          <a:ln w="3600">
+            <a:solidFill>
+              <a:srgbClr val="E3E5E9"/>
+            </a:solidFill>
+          </a:ln>
+        </p:spPr>
+      </p:cxnSp>
+      <p:sp>
+        <p:nvSpPr>
+          <p:cNvPr id="11" name="텍스트"/>
+          <p:cNvSpPr txBox="1"/>
+          <p:nvPr/>
+        </p:nvSpPr>
+        <p:spPr>
+          <a:xfrm>
+            <a:off x="252000" y="882000"/>
+            <a:ext cx="216000" cy="95251"/>
+          </a:xfrm>
+          <a:prstGeom prst="rect">
+            <a:avLst/>
+          </a:prstGeom>
+          <a:noFill/>
+        </p:spPr>
+        <p:txBody>
+          <a:bodyPr wrap="square" lIns="0" rIns="0" tIns="0" bIns="0" anchor="t">
+            <a:spAutoFit/>
+          </a:bodyPr>
+          <a:lstStyle/>
+          <a:p>
+            <a:pPr algn="l">
+              <a:lnSpc>
+                <a:spcPts val="725"/>
+              </a:lnSpc>
+            </a:pPr>
+            <a:r>
+              <a:rPr sz="500" b="1" spc="100">
+                <a:solidFill>
+                  <a:srgbClr val="6B7280"/>
+                </a:solidFill>
+                <a:latin typeface="맑은 고딕"/>
+                <a:ea typeface="맑은 고딕"/>
+              </a:rPr>
+              <a:t>03</a:t>
+            </a:r>
+          </a:p>
+        </p:txBody>
+      </p:sp>
+      <p:sp>
+        <p:nvSpPr>
+          <p:cNvPr id="12" name="텍스트"/>
+          <p:cNvSpPr txBox="1"/>
+          <p:nvPr/>
+        </p:nvSpPr>
+        <p:spPr>
+          <a:xfrm>
+            <a:off x="489600" y="871200"/>
+            <a:ext cx="1260000" cy="133351"/>
+          </a:xfrm>
+          <a:prstGeom prst="rect">
+            <a:avLst/>
+          </a:prstGeom>
+          <a:noFill/>
+        </p:spPr>
+        <p:txBody>
+          <a:bodyPr wrap="square" lIns="0" rIns="0" tIns="0" bIns="0" anchor="t">
+            <a:spAutoFit/>
+          </a:bodyPr>
+          <a:lstStyle/>
+          <a:p>
+            <a:pPr algn="l">
+              <a:lnSpc>
+                <a:spcPts val="1015"/>
+              </a:lnSpc>
+            </a:pPr>
+            <a:r>
+              <a:rPr sz="700" b="0">
+                <a:solidFill>
+                  <a:srgbClr val="12151C"/>
+                </a:solidFill>
+                <a:latin typeface="맑은 고딕"/>
+                <a:ea typeface="맑은 고딕"/>
+              </a:rPr>
+              <a:t>매매 · 임대</a:t>
+            </a:r>
+          </a:p>
+        </p:txBody>
+      </p:sp>
+      <p:cxnSp>
+        <p:nvCxnSpPr>
+          <p:cNvPr id="13" name="Connector 12"/>
+          <p:cNvCxnSpPr/>
+          <p:nvPr/>
+        </p:nvCxnSpPr>
+        <p:spPr>
+          <a:xfrm>
+            <a:off x="252000" y="1015200"/>
+            <a:ext cx="1512000" cy="0"/>
+          </a:xfrm>
+          <a:prstGeom prst="line">
+            <a:avLst/>
+          </a:prstGeom>
+          <a:ln w="3600">
+            <a:solidFill>
+              <a:srgbClr val="E3E5E9"/>
+            </a:solidFill>
+          </a:ln>
+        </p:spPr>
+      </p:cxnSp>
+      <p:sp>
+        <p:nvSpPr>
+          <p:cNvPr id="14" name="텍스트"/>
+          <p:cNvSpPr txBox="1"/>
+          <p:nvPr/>
+        </p:nvSpPr>
+        <p:spPr>
+          <a:xfrm>
+            <a:off x="252000" y="1069200"/>
+            <a:ext cx="216000" cy="95251"/>
+          </a:xfrm>
+          <a:prstGeom prst="rect">
+            <a:avLst/>
+          </a:prstGeom>
+          <a:noFill/>
+        </p:spPr>
+        <p:txBody>
+          <a:bodyPr wrap="square" lIns="0" rIns="0" tIns="0" bIns="0" anchor="t">
+            <a:spAutoFit/>
+          </a:bodyPr>
+          <a:lstStyle/>
+          <a:p>
+            <a:pPr algn="l">
+              <a:lnSpc>
+                <a:spcPts val="725"/>
+              </a:lnSpc>
+            </a:pPr>
+            <a:r>
+              <a:rPr sz="500" b="1" spc="100">
+                <a:solidFill>
+                  <a:srgbClr val="6B7280"/>
+                </a:solidFill>
+                <a:latin typeface="맑은 고딕"/>
+                <a:ea typeface="맑은 고딕"/>
+              </a:rPr>
+              <a:t>04</a:t>
+            </a:r>
+          </a:p>
+        </p:txBody>
+      </p:sp>
+      <p:sp>
+        <p:nvSpPr>
+          <p:cNvPr id="15" name="텍스트"/>
+          <p:cNvSpPr txBox="1"/>
+          <p:nvPr/>
+        </p:nvSpPr>
+        <p:spPr>
+          <a:xfrm>
+            <a:off x="489600" y="1058400"/>
+            <a:ext cx="1260000" cy="133351"/>
+          </a:xfrm>
+          <a:prstGeom prst="rect">
+            <a:avLst/>
+          </a:prstGeom>
+          <a:noFill/>
+        </p:spPr>
+        <p:txBody>
+          <a:bodyPr wrap="square" lIns="0" rIns="0" tIns="0" bIns="0" anchor="t">
+            <a:spAutoFit/>
+          </a:bodyPr>
+          <a:lstStyle/>
+          <a:p>
+            <a:pPr algn="l">
+              <a:lnSpc>
+                <a:spcPts val="1015"/>
+              </a:lnSpc>
+            </a:pPr>
+            <a:r>
+              <a:rPr sz="700" b="0">
+                <a:solidFill>
+                  <a:srgbClr val="12151C"/>
+                </a:solidFill>
+                <a:latin typeface="맑은 고딕"/>
+                <a:ea typeface="맑은 고딕"/>
+              </a:rPr>
+              <a:t>증권 정리</a:t>
+            </a:r>
+          </a:p>
+        </p:txBody>
+      </p:sp>
+      <p:cxnSp>
+        <p:nvCxnSpPr>
+          <p:cNvPr id="16" name="Connector 15"/>
+          <p:cNvCxnSpPr/>
+          <p:nvPr/>
+        </p:nvCxnSpPr>
+        <p:spPr>
+          <a:xfrm>
+            <a:off x="252000" y="1202400"/>
+            <a:ext cx="1512000" cy="0"/>
+          </a:xfrm>
+          <a:prstGeom prst="line">
+            <a:avLst/>
+          </a:prstGeom>
+          <a:ln w="3600">
+            <a:solidFill>
+              <a:srgbClr val="E3E5E9"/>
+            </a:solidFill>
+          </a:ln>
+        </p:spPr>
+      </p:cxnSp>
+      <p:sp>
+        <p:nvSpPr>
+          <p:cNvPr id="17" name="Rectangle 16"/>
           <p:cNvSpPr/>
           <p:nvPr/>
         </p:nvSpPr>
         <p:spPr>
           <a:xfrm>
-            <a:off x="2412000" y="972000"/>
-            <a:ext cx="828000" cy="828000"/>
-          </a:xfrm>
-          <a:custGeom>
+            <a:off x="2088000" y="252000"/>
+            <a:ext cx="900000" cy="1296000"/>
+          </a:xfrm>
+          <a:prstGeom prst="rect">
             <a:avLst/>
-            <a:gdLst/>
-            <a:ahLst/>
-            <a:cxnLst/>
-            <a:rect l="l" t="t" r="r" b="b"/>
-            <a:pathLst>
-              <a:path w="828000" h="828000">
-                <a:moveTo>
-                  <a:pt x="828000" y="828000"/>
-                </a:moveTo>
-                <a:lnTo>
-                  <a:pt x="0" y="828000"/>
-                </a:lnTo>
-                <a:lnTo>
-                  <a:pt x="1773" y="773846"/>
-                </a:lnTo>
-                <a:lnTo>
-                  <a:pt x="7084" y="719924"/>
-                </a:lnTo>
-                <a:lnTo>
-                  <a:pt x="15910" y="666465"/>
-                </a:lnTo>
-                <a:lnTo>
-                  <a:pt x="28213" y="613698"/>
-                </a:lnTo>
-                <a:lnTo>
-                  <a:pt x="43942" y="561848"/>
-                </a:lnTo>
-                <a:lnTo>
-                  <a:pt x="63028" y="511138"/>
-                </a:lnTo>
-                <a:lnTo>
-                  <a:pt x="85389" y="461785"/>
-                </a:lnTo>
-                <a:lnTo>
-                  <a:pt x="110931" y="414000"/>
-                </a:lnTo>
-                <a:lnTo>
-                  <a:pt x="139543" y="367988"/>
-                </a:lnTo>
-                <a:lnTo>
-                  <a:pt x="171103" y="323946"/>
-                </a:lnTo>
-                <a:lnTo>
-                  <a:pt x="205477" y="282062"/>
-                </a:lnTo>
-                <a:lnTo>
-                  <a:pt x="242516" y="242516"/>
-                </a:lnTo>
-                <a:lnTo>
-                  <a:pt x="282062" y="205477"/>
-                </a:lnTo>
-                <a:lnTo>
-                  <a:pt x="323946" y="171103"/>
-                </a:lnTo>
-                <a:lnTo>
-                  <a:pt x="367988" y="139543"/>
-                </a:lnTo>
-                <a:lnTo>
-                  <a:pt x="414000" y="110931"/>
-                </a:lnTo>
-                <a:lnTo>
-                  <a:pt x="461785" y="85389"/>
-                </a:lnTo>
-                <a:lnTo>
-                  <a:pt x="511138" y="63028"/>
-                </a:lnTo>
-                <a:lnTo>
-                  <a:pt x="561848" y="43942"/>
-                </a:lnTo>
-                <a:lnTo>
-                  <a:pt x="613698" y="28213"/>
-                </a:lnTo>
-                <a:lnTo>
-                  <a:pt x="666465" y="15910"/>
-                </a:lnTo>
-                <a:lnTo>
-                  <a:pt x="719924" y="7084"/>
-                </a:lnTo>
-                <a:lnTo>
-                  <a:pt x="773846" y="1773"/>
-                </a:lnTo>
-                <a:lnTo>
-                  <a:pt x="828000" y="0"/>
-                </a:lnTo>
-                <a:close/>
-              </a:path>
-            </a:pathLst>
-          </a:custGeom>
+          </a:prstGeom>
           <a:solidFill>
-            <a:srgbClr val="F3565D"/>
+            <a:srgbClr val="F0262F"/>
           </a:solidFill>
           <a:ln>
             <a:noFill/>
@@ -4090,14 +4108,14 @@
       </p:sp>
       <p:sp>
         <p:nvSpPr>
-          <p:cNvPr id="4" name="텍스트"/>
+          <p:cNvPr id="18" name="텍스트"/>
           <p:cNvSpPr txBox="1"/>
           <p:nvPr/>
         </p:nvSpPr>
         <p:spPr>
           <a:xfrm>
-            <a:off x="252000" y="432000"/>
-            <a:ext cx="2304000" cy="720000"/>
+            <a:off x="2196000" y="360000"/>
+            <a:ext cx="684000" cy="95251"/>
           </a:xfrm>
           <a:prstGeom prst="rect">
             <a:avLst/>
@@ -4112,32 +4130,95 @@
           <a:p>
             <a:pPr algn="l">
               <a:lnSpc>
-                <a:spcPts val="1884"/>
+                <a:spcPts val="725"/>
               </a:lnSpc>
             </a:pPr>
             <a:r>
-              <a:rPr sz="1300" b="1">
+              <a:rPr sz="500" b="1" spc="240">
+                <a:solidFill>
+                  <a:srgbClr val="FFFFFF">
+                    <a:alpha val="75000"/>
+                  </a:srgbClr>
+                </a:solidFill>
+                <a:latin typeface="맑은 고딕"/>
+                <a:ea typeface="맑은 고딕"/>
+              </a:rPr>
+              <a:t>INFO</a:t>
+            </a:r>
+          </a:p>
+        </p:txBody>
+      </p:sp>
+      <p:sp>
+        <p:nvSpPr>
+          <p:cNvPr id="19" name="텍스트"/>
+          <p:cNvSpPr txBox="1"/>
+          <p:nvPr/>
+        </p:nvSpPr>
+        <p:spPr>
+          <a:xfrm>
+            <a:off x="2196000" y="504000"/>
+            <a:ext cx="684000" cy="121921"/>
+          </a:xfrm>
+          <a:prstGeom prst="rect">
+            <a:avLst/>
+          </a:prstGeom>
+          <a:noFill/>
+        </p:spPr>
+        <p:txBody>
+          <a:bodyPr wrap="square" lIns="0" rIns="0" tIns="0" bIns="0" anchor="t">
+            <a:spAutoFit/>
+          </a:bodyPr>
+          <a:lstStyle/>
+          <a:p>
+            <a:pPr algn="l">
+              <a:lnSpc>
+                <a:spcPts val="927"/>
+              </a:lnSpc>
+            </a:pPr>
+            <a:r>
+              <a:rPr sz="640" b="1">
                 <a:solidFill>
                   <a:srgbClr val="FFFFFF"/>
                 </a:solidFill>
                 <a:latin typeface="맑은 고딕"/>
                 <a:ea typeface="맑은 고딕"/>
               </a:rPr>
-              <a:t>오래 보아도 편안한 사이</a:t>
-            </a:r>
-          </a:p>
-        </p:txBody>
-      </p:sp>
-      <p:sp>
-        <p:nvSpPr>
-          <p:cNvPr id="5" name="텍스트"/>
+              <a:t>평일 10:00 – 19:00</a:t>
+            </a:r>
+          </a:p>
+        </p:txBody>
+      </p:sp>
+      <p:cxnSp>
+        <p:nvCxnSpPr>
+          <p:cNvPr id="20" name="Connector 19"/>
+          <p:cNvCxnSpPr/>
+          <p:nvPr/>
+        </p:nvCxnSpPr>
+        <p:spPr>
+          <a:xfrm>
+            <a:off x="2196000" y="770400"/>
+            <a:ext cx="684000" cy="0"/>
+          </a:xfrm>
+          <a:prstGeom prst="line">
+            <a:avLst/>
+          </a:prstGeom>
+          <a:ln w="3600">
+            <a:solidFill>
+              <a:srgbClr val="FFFFFF"/>
+            </a:solidFill>
+          </a:ln>
+        </p:spPr>
+      </p:cxnSp>
+      <p:sp>
+        <p:nvSpPr>
+          <p:cNvPr id="21" name="텍스트"/>
           <p:cNvSpPr txBox="1"/>
           <p:nvPr/>
         </p:nvSpPr>
         <p:spPr>
           <a:xfrm>
-            <a:off x="252000" y="1476000"/>
-            <a:ext cx="1800000" cy="133351"/>
+            <a:off x="2196000" y="849600"/>
+            <a:ext cx="684000" cy="91441"/>
           </a:xfrm>
           <a:prstGeom prst="rect">
             <a:avLst/>
@@ -4152,11 +4233,93 @@
           <a:p>
             <a:pPr algn="l">
               <a:lnSpc>
-                <a:spcPts val="1015"/>
+                <a:spcPts val="696"/>
               </a:lnSpc>
             </a:pPr>
             <a:r>
-              <a:rPr sz="700" b="1" spc="200">
+              <a:rPr sz="480" b="1" spc="140">
+                <a:solidFill>
+                  <a:srgbClr val="FFFFFF">
+                    <a:alpha val="75000"/>
+                  </a:srgbClr>
+                </a:solidFill>
+                <a:latin typeface="맑은 고딕"/>
+                <a:ea typeface="맑은 고딕"/>
+              </a:rPr>
+              <a:t>INSTAGRAM</a:t>
+            </a:r>
+          </a:p>
+        </p:txBody>
+      </p:sp>
+      <p:sp>
+        <p:nvSpPr>
+          <p:cNvPr id="22" name="텍스트"/>
+          <p:cNvSpPr txBox="1"/>
+          <p:nvPr/>
+        </p:nvSpPr>
+        <p:spPr>
+          <a:xfrm>
+            <a:off x="2196000" y="957600"/>
+            <a:ext cx="684000" cy="121921"/>
+          </a:xfrm>
+          <a:prstGeom prst="rect">
+            <a:avLst/>
+          </a:prstGeom>
+          <a:noFill/>
+        </p:spPr>
+        <p:txBody>
+          <a:bodyPr wrap="square" lIns="0" rIns="0" tIns="0" bIns="0" anchor="t">
+            <a:spAutoFit/>
+          </a:bodyPr>
+          <a:lstStyle/>
+          <a:p>
+            <a:pPr algn="l">
+              <a:lnSpc>
+                <a:spcPts val="927"/>
+              </a:lnSpc>
+            </a:pPr>
+            <a:r>
+              <a:rPr sz="640" b="1">
+                <a:solidFill>
+                  <a:srgbClr val="FFFFFF"/>
+                </a:solidFill>
+                <a:latin typeface="맑은 고딕"/>
+                <a:ea typeface="맑은 고딕"/>
+              </a:rPr>
+              <a:t>@아이디</a:t>
+            </a:r>
+          </a:p>
+        </p:txBody>
+      </p:sp>
+      <p:sp>
+        <p:nvSpPr>
+          <p:cNvPr id="23" name="텍스트"/>
+          <p:cNvSpPr txBox="1"/>
+          <p:nvPr/>
+        </p:nvSpPr>
+        <p:spPr>
+          <a:xfrm>
+            <a:off x="2196000" y="1368000"/>
+            <a:ext cx="720000" cy="106681"/>
+          </a:xfrm>
+          <a:prstGeom prst="rect">
+            <a:avLst/>
+          </a:prstGeom>
+          <a:noFill/>
+        </p:spPr>
+        <p:txBody>
+          <a:bodyPr wrap="square" lIns="0" rIns="0" tIns="0" bIns="0" anchor="t">
+            <a:spAutoFit/>
+          </a:bodyPr>
+          <a:lstStyle/>
+          <a:p>
+            <a:pPr algn="l">
+              <a:lnSpc>
+                <a:spcPts val="811"/>
+              </a:lnSpc>
+            </a:pPr>
+            <a:r>
+              <a:rPr sz="560" b="1" spc="80">
                 <a:solidFill>
                   <a:srgbClr val="FFFFFF"/>
                 </a:solidFill>
